--- a/UC007_Claims_Processing_Capstone_Presentation.pptx
+++ b/UC007_Claims_Processing_Capstone_Presentation.pptx
@@ -12,7 +12,6 @@
     <p:sldId id="260" r:id="rId11"/>
     <p:sldId id="261" r:id="rId12"/>
     <p:sldId id="262" r:id="rId13"/>
-    <p:sldId id="263" r:id="rId14"/>
   </p:sldIdLst>
   <p:sldSz cx="12191695" cy="6858000" type="screen4x3"/>
   <p:notesSz cx="6858000" cy="9144000"/>
@@ -3090,9 +3089,7 @@
   <p:cSld>
     <p:bg>
       <p:bgPr>
-        <a:solidFill>
-          <a:srgbClr val="FFFFFF"/>
-        </a:solidFill>
+        <a:solidFill/>
         <a:effectLst/>
       </p:bgPr>
     </p:bg>
@@ -3112,14 +3109,12 @@
         <p:spPr>
           <a:xfrm>
             <a:off x="0" y="0"/>
-            <a:ext cx="12191695" cy="502920"/>
+            <a:ext cx="12191695" cy="822960"/>
           </a:xfrm>
           <a:prstGeom prst="rect">
             <a:avLst/>
           </a:prstGeom>
-          <a:solidFill>
-            <a:srgbClr val="0C2245"/>
-          </a:solidFill>
+          <a:solidFill/>
           <a:ln>
             <a:noFill/>
           </a:ln>
@@ -3154,8 +3149,8 @@
         </p:nvSpPr>
         <p:spPr>
           <a:xfrm>
-            <a:off x="640080" y="914400"/>
-            <a:ext cx="10789920" cy="914400"/>
+            <a:off x="640080" y="1097280"/>
+            <a:ext cx="9601200" cy="640080"/>
           </a:xfrm>
           <a:prstGeom prst="rect">
             <a:avLst/>
@@ -3170,13 +3165,11 @@
           <a:p>
             <a:pPr>
               <a:defRPr sz="2800" b="1">
-                <a:solidFill>
-                  <a:srgbClr val="0C2245"/>
-                </a:solidFill>
+                <a:solidFill/>
               </a:defRPr>
             </a:pPr>
             <a:r>
-              <a:t>UC007 · Claims Processing Agent</a:t>
+              <a:t>AI-Powered Motor Claims Review</a:t>
             </a:r>
           </a:p>
         </p:txBody>
@@ -3189,8 +3182,8 @@
         </p:nvSpPr>
         <p:spPr>
           <a:xfrm>
-            <a:off x="640080" y="1828800"/>
-            <a:ext cx="10058400" cy="640080"/>
+            <a:off x="640080" y="1737360"/>
+            <a:ext cx="10789920" cy="548640"/>
           </a:xfrm>
           <a:prstGeom prst="rect">
             <a:avLst/>
@@ -3205,13 +3198,11 @@
           <a:p>
             <a:pPr>
               <a:defRPr sz="1800">
-                <a:solidFill>
-                  <a:srgbClr val="586069"/>
-                </a:solidFill>
+                <a:solidFill/>
               </a:defRPr>
             </a:pPr>
             <a:r>
-              <a:t>Capstone presentation | End-to-end evidence, policy checks, and human review</a:t>
+              <a:t>Capstone Project Presentation | Claims Review &amp; Fraud Risk Assessment</a:t>
             </a:r>
           </a:p>
         </p:txBody>
@@ -3224,19 +3215,15 @@
         </p:nvSpPr>
         <p:spPr>
           <a:xfrm>
-            <a:off x="822960" y="2926080"/>
-            <a:ext cx="2194560" cy="1188720"/>
+            <a:off x="731520" y="2651760"/>
+            <a:ext cx="5212080" cy="2468880"/>
           </a:xfrm>
           <a:prstGeom prst="rect">
             <a:avLst/>
           </a:prstGeom>
-          <a:solidFill>
-            <a:srgbClr val="F5F7FA"/>
-          </a:solidFill>
+          <a:solidFill/>
           <a:ln>
-            <a:solidFill>
-              <a:srgbClr val="0066CC"/>
-            </a:solidFill>
+            <a:solidFill/>
           </a:ln>
         </p:spPr>
         <p:style>
@@ -3257,52 +3244,122 @@
           <a:bodyPr rtlCol="0" anchor="ctr" wrap="square"/>
           <a:lstStyle/>
           <a:p>
-            <a:pPr algn="ctr">
-              <a:defRPr sz="2400" b="1">
-                <a:solidFill>
-                  <a:srgbClr val="0066CC"/>
-                </a:solidFill>
-              </a:defRPr>
-            </a:pPr>
-            <a:r>
-              <a:t>5 / 5</a:t>
-            </a:r>
-          </a:p>
-          <a:p>
-            <a:pPr algn="ctr">
-              <a:defRPr sz="1100">
-                <a:solidFill>
-                  <a:srgbClr val="586069"/>
-                </a:solidFill>
-              </a:defRPr>
-            </a:pPr>
-            <a:r>
-              <a:t>Claims fully passed</a:t>
-            </a:r>
-          </a:p>
-        </p:txBody>
-      </p:sp>
-      <p:sp>
-        <p:nvSpPr>
-          <p:cNvPr id="6" name="Rectangle 5"/>
+            <a:pPr algn="ctr"/>
+          </a:p>
+        </p:txBody>
+      </p:sp>
+    </p:spTree>
+  </p:cSld>
+  <p:clrMapOvr>
+    <a:masterClrMapping/>
+  </p:clrMapOvr>
+</p:sld>
+</file>
+
+<file path=ppt/slides/slide2.xml><?xml version="1.0" encoding="utf-8"?>
+<p:sld xmlns:a="http://schemas.openxmlformats.org/drawingml/2006/main" xmlns:p="http://schemas.openxmlformats.org/presentationml/2006/main" xmlns:r="http://schemas.openxmlformats.org/officeDocument/2006/relationships">
+  <p:cSld>
+    <p:bg>
+      <p:bgPr>
+        <a:solidFill/>
+        <a:effectLst/>
+      </p:bgPr>
+    </p:bg>
+    <p:spTree>
+      <p:nvGrpSpPr>
+        <p:cNvPr id="1" name=""/>
+        <p:cNvGrpSpPr/>
+        <p:nvPr/>
+      </p:nvGrpSpPr>
+      <p:grpSpPr/>
+      <p:sp>
+        <p:nvSpPr>
+          <p:cNvPr id="2" name="Rectangle 1"/>
           <p:cNvSpPr/>
           <p:nvPr/>
         </p:nvSpPr>
         <p:spPr>
           <a:xfrm>
-            <a:off x="3657600" y="2926080"/>
-            <a:ext cx="2194560" cy="1188720"/>
+            <a:off x="0" y="0"/>
+            <a:ext cx="12191695" cy="777240"/>
           </a:xfrm>
           <a:prstGeom prst="rect">
             <a:avLst/>
           </a:prstGeom>
-          <a:solidFill>
-            <a:srgbClr val="F5F7FA"/>
-          </a:solidFill>
+          <a:solidFill/>
+        </p:spPr>
+        <p:style>
+          <a:lnRef idx="1">
+            <a:schemeClr val="accent1"/>
+          </a:lnRef>
+          <a:fillRef idx="3">
+            <a:schemeClr val="accent1"/>
+          </a:fillRef>
+          <a:effectRef idx="2">
+            <a:schemeClr val="accent1"/>
+          </a:effectRef>
+          <a:fontRef idx="minor">
+            <a:schemeClr val="lt1"/>
+          </a:fontRef>
+        </p:style>
+        <p:txBody>
+          <a:bodyPr rtlCol="0" anchor="ctr"/>
+          <a:lstStyle/>
+          <a:p>
+            <a:pPr algn="ctr"/>
+          </a:p>
+        </p:txBody>
+      </p:sp>
+      <p:sp>
+        <p:nvSpPr>
+          <p:cNvPr id="3" name="TextBox 2"/>
+          <p:cNvSpPr txBox="1"/>
+          <p:nvPr/>
+        </p:nvSpPr>
+        <p:spPr>
+          <a:xfrm>
+            <a:off x="640080" y="164592"/>
+            <a:ext cx="8046720" cy="365760"/>
+          </a:xfrm>
+          <a:prstGeom prst="rect">
+            <a:avLst/>
+          </a:prstGeom>
+          <a:noFill/>
+        </p:spPr>
+        <p:txBody>
+          <a:bodyPr wrap="none">
+            <a:spAutoFit/>
+          </a:bodyPr>
+          <a:lstStyle/>
+          <a:p>
+            <a:pPr>
+              <a:defRPr sz="2600" b="1">
+                <a:solidFill/>
+              </a:defRPr>
+            </a:pPr>
+            <a:r>
+              <a:t>1. Problem Statement and Objectives</a:t>
+            </a:r>
+          </a:p>
+        </p:txBody>
+      </p:sp>
+      <p:sp>
+        <p:nvSpPr>
+          <p:cNvPr id="4" name="Rectangle 3"/>
+          <p:cNvSpPr/>
+          <p:nvPr/>
+        </p:nvSpPr>
+        <p:spPr>
+          <a:xfrm>
+            <a:off x="640080" y="1280160"/>
+            <a:ext cx="5303520" cy="4754880"/>
+          </a:xfrm>
+          <a:prstGeom prst="rect">
+            <a:avLst/>
+          </a:prstGeom>
+          <a:solidFill/>
           <a:ln>
-            <a:solidFill>
-              <a:srgbClr val="0066CC"/>
-            </a:solidFill>
+            <a:solidFill/>
           </a:ln>
         </p:spPr>
         <p:style>
@@ -3320,55 +3377,125 @@
           </a:fontRef>
         </p:style>
         <p:txBody>
-          <a:bodyPr rtlCol="0" anchor="ctr" wrap="square"/>
-          <a:lstStyle/>
-          <a:p>
-            <a:pPr algn="ctr">
-              <a:defRPr sz="2400" b="1">
-                <a:solidFill>
-                  <a:srgbClr val="0066CC"/>
-                </a:solidFill>
-              </a:defRPr>
-            </a:pPr>
-            <a:r>
-              <a:t>45 / 45</a:t>
-            </a:r>
-          </a:p>
-          <a:p>
-            <a:pPr algn="ctr">
-              <a:defRPr sz="1100">
-                <a:solidFill>
-                  <a:srgbClr val="586069"/>
-                </a:solidFill>
-              </a:defRPr>
-            </a:pPr>
-            <a:r>
-              <a:t>Extraction accuracy</a:t>
-            </a:r>
-          </a:p>
-        </p:txBody>
-      </p:sp>
-      <p:sp>
-        <p:nvSpPr>
-          <p:cNvPr id="7" name="Rectangle 6"/>
+          <a:bodyPr rtlCol="0" anchor="ctr"/>
+          <a:lstStyle/>
+          <a:p>
+            <a:pPr algn="ctr"/>
+          </a:p>
+        </p:txBody>
+      </p:sp>
+    </p:spTree>
+  </p:cSld>
+  <p:clrMapOvr>
+    <a:masterClrMapping/>
+  </p:clrMapOvr>
+</p:sld>
+</file>
+
+<file path=ppt/slides/slide3.xml><?xml version="1.0" encoding="utf-8"?>
+<p:sld xmlns:a="http://schemas.openxmlformats.org/drawingml/2006/main" xmlns:p="http://schemas.openxmlformats.org/presentationml/2006/main" xmlns:r="http://schemas.openxmlformats.org/officeDocument/2006/relationships">
+  <p:cSld>
+    <p:bg>
+      <p:bgPr>
+        <a:solidFill/>
+        <a:effectLst/>
+      </p:bgPr>
+    </p:bg>
+    <p:spTree>
+      <p:nvGrpSpPr>
+        <p:cNvPr id="1" name=""/>
+        <p:cNvGrpSpPr/>
+        <p:nvPr/>
+      </p:nvGrpSpPr>
+      <p:grpSpPr/>
+      <p:sp>
+        <p:nvSpPr>
+          <p:cNvPr id="2" name="Rectangle 1"/>
           <p:cNvSpPr/>
           <p:nvPr/>
         </p:nvSpPr>
         <p:spPr>
           <a:xfrm>
-            <a:off x="6492240" y="2926080"/>
-            <a:ext cx="2194560" cy="1188720"/>
+            <a:off x="0" y="0"/>
+            <a:ext cx="12191695" cy="777240"/>
           </a:xfrm>
           <a:prstGeom prst="rect">
             <a:avLst/>
           </a:prstGeom>
-          <a:solidFill>
-            <a:srgbClr val="F5F7FA"/>
-          </a:solidFill>
+          <a:solidFill/>
+        </p:spPr>
+        <p:style>
+          <a:lnRef idx="1">
+            <a:schemeClr val="accent1"/>
+          </a:lnRef>
+          <a:fillRef idx="3">
+            <a:schemeClr val="accent1"/>
+          </a:fillRef>
+          <a:effectRef idx="2">
+            <a:schemeClr val="accent1"/>
+          </a:effectRef>
+          <a:fontRef idx="minor">
+            <a:schemeClr val="lt1"/>
+          </a:fontRef>
+        </p:style>
+        <p:txBody>
+          <a:bodyPr rtlCol="0" anchor="ctr"/>
+          <a:lstStyle/>
+          <a:p>
+            <a:pPr algn="ctr"/>
+          </a:p>
+        </p:txBody>
+      </p:sp>
+      <p:sp>
+        <p:nvSpPr>
+          <p:cNvPr id="3" name="TextBox 2"/>
+          <p:cNvSpPr txBox="1"/>
+          <p:nvPr/>
+        </p:nvSpPr>
+        <p:spPr>
+          <a:xfrm>
+            <a:off x="640080" y="164592"/>
+            <a:ext cx="6400800" cy="365760"/>
+          </a:xfrm>
+          <a:prstGeom prst="rect">
+            <a:avLst/>
+          </a:prstGeom>
+          <a:noFill/>
+        </p:spPr>
+        <p:txBody>
+          <a:bodyPr wrap="none">
+            <a:spAutoFit/>
+          </a:bodyPr>
+          <a:lstStyle/>
+          <a:p>
+            <a:pPr>
+              <a:defRPr sz="2600" b="1">
+                <a:solidFill/>
+              </a:defRPr>
+            </a:pPr>
+            <a:r>
+              <a:t>2. Methodology</a:t>
+            </a:r>
+          </a:p>
+        </p:txBody>
+      </p:sp>
+      <p:sp>
+        <p:nvSpPr>
+          <p:cNvPr id="4" name="Rectangle 3"/>
+          <p:cNvSpPr/>
+          <p:nvPr/>
+        </p:nvSpPr>
+        <p:spPr>
+          <a:xfrm>
+            <a:off x="731520" y="1371600"/>
+            <a:ext cx="3474720" cy="1645920"/>
+          </a:xfrm>
+          <a:prstGeom prst="rect">
+            <a:avLst/>
+          </a:prstGeom>
+          <a:solidFill/>
           <a:ln>
-            <a:solidFill>
-              <a:srgbClr val="0066CC"/>
-            </a:solidFill>
+            <a:solidFill/>
           </a:ln>
         </p:spPr>
         <p:style>
@@ -3386,55 +3513,322 @@
           </a:fontRef>
         </p:style>
         <p:txBody>
-          <a:bodyPr rtlCol="0" anchor="ctr" wrap="square"/>
+          <a:bodyPr rtlCol="0" anchor="ctr"/>
           <a:lstStyle/>
           <a:p>
             <a:pPr algn="ctr">
-              <a:defRPr sz="2400" b="1">
-                <a:solidFill>
-                  <a:srgbClr val="0066CC"/>
-                </a:solidFill>
+              <a:defRPr sz="1800">
+                <a:solidFill/>
               </a:defRPr>
             </a:pPr>
             <a:r>
-              <a:t>0</a:t>
-            </a:r>
-          </a:p>
-          <a:p>
-            <a:pPr algn="ctr">
-              <a:defRPr sz="1100">
-                <a:solidFill>
-                  <a:srgbClr val="586069"/>
-                </a:solidFill>
-              </a:defRPr>
-            </a:pPr>
-            <a:r>
-              <a:t>Safety violations</a:t>
-            </a:r>
-          </a:p>
-        </p:txBody>
-      </p:sp>
-      <p:sp>
-        <p:nvSpPr>
-          <p:cNvPr id="8" name="Rectangle 7"/>
+              <a:t>The system correctly processed all five sample claims. It handled valid claims, missing-evidence cases, contradictory claims, policy-exception scenarios and fraud-like claim patterns with strong accuracy.</a:t>
+            </a:r>
+          </a:p>
+        </p:txBody>
+      </p:sp>
+    </p:spTree>
+  </p:cSld>
+  <p:clrMapOvr>
+    <a:masterClrMapping/>
+  </p:clrMapOvr>
+</p:sld>
+</file>
+
+<file path=ppt/slides/slide4.xml><?xml version="1.0" encoding="utf-8"?>
+<p:sld xmlns:a="http://schemas.openxmlformats.org/drawingml/2006/main" xmlns:p="http://schemas.openxmlformats.org/presentationml/2006/main" xmlns:r="http://schemas.openxmlformats.org/officeDocument/2006/relationships">
+  <p:cSld>
+    <p:bg>
+      <p:bgPr>
+        <a:solidFill/>
+        <a:effectLst/>
+      </p:bgPr>
+    </p:bg>
+    <p:spTree>
+      <p:nvGrpSpPr>
+        <p:cNvPr id="1" name=""/>
+        <p:cNvGrpSpPr/>
+        <p:nvPr/>
+      </p:nvGrpSpPr>
+      <p:grpSpPr/>
+      <p:sp>
+        <p:nvSpPr>
+          <p:cNvPr id="2" name="Rectangle 1"/>
           <p:cNvSpPr/>
           <p:nvPr/>
         </p:nvSpPr>
         <p:spPr>
           <a:xfrm>
-            <a:off x="9326880" y="2926080"/>
-            <a:ext cx="2194560" cy="1188720"/>
+            <a:off x="0" y="0"/>
+            <a:ext cx="12191695" cy="777240"/>
           </a:xfrm>
           <a:prstGeom prst="rect">
             <a:avLst/>
           </a:prstGeom>
-          <a:solidFill>
-            <a:srgbClr val="F5F7FA"/>
-          </a:solidFill>
+          <a:solidFill/>
+        </p:spPr>
+        <p:style>
+          <a:lnRef idx="1">
+            <a:schemeClr val="accent1"/>
+          </a:lnRef>
+          <a:fillRef idx="3">
+            <a:schemeClr val="accent1"/>
+          </a:fillRef>
+          <a:effectRef idx="2">
+            <a:schemeClr val="accent1"/>
+          </a:effectRef>
+          <a:fontRef idx="minor">
+            <a:schemeClr val="lt1"/>
+          </a:fontRef>
+        </p:style>
+        <p:txBody>
+          <a:bodyPr rtlCol="0" anchor="ctr"/>
+          <a:lstStyle/>
+          <a:p>
+            <a:pPr algn="ctr"/>
+          </a:p>
+        </p:txBody>
+      </p:sp>
+      <p:sp>
+        <p:nvSpPr>
+          <p:cNvPr id="3" name="TextBox 2"/>
+          <p:cNvSpPr txBox="1"/>
+          <p:nvPr/>
+        </p:nvSpPr>
+        <p:spPr>
+          <a:xfrm>
+            <a:off x="640080" y="164592"/>
+            <a:ext cx="9144000" cy="365760"/>
+          </a:xfrm>
+          <a:prstGeom prst="rect">
+            <a:avLst/>
+          </a:prstGeom>
+          <a:noFill/>
+        </p:spPr>
+        <p:txBody>
+          <a:bodyPr wrap="none">
+            <a:spAutoFit/>
+          </a:bodyPr>
+          <a:lstStyle/>
+          <a:p>
+            <a:pPr>
+              <a:defRPr sz="2600" b="1">
+                <a:solidFill/>
+              </a:defRPr>
+            </a:pPr>
+            <a:r>
+              <a:t>3. Implementation – Framework &amp; Data Flow</a:t>
+            </a:r>
+          </a:p>
+        </p:txBody>
+      </p:sp>
+    </p:spTree>
+  </p:cSld>
+  <p:clrMapOvr>
+    <a:masterClrMapping/>
+  </p:clrMapOvr>
+</p:sld>
+</file>
+
+<file path=ppt/slides/slide5.xml><?xml version="1.0" encoding="utf-8"?>
+<p:sld xmlns:a="http://schemas.openxmlformats.org/drawingml/2006/main" xmlns:p="http://schemas.openxmlformats.org/presentationml/2006/main" xmlns:r="http://schemas.openxmlformats.org/officeDocument/2006/relationships">
+  <p:cSld>
+    <p:bg>
+      <p:bgPr>
+        <a:solidFill/>
+        <a:effectLst/>
+      </p:bgPr>
+    </p:bg>
+    <p:spTree>
+      <p:nvGrpSpPr>
+        <p:cNvPr id="1" name=""/>
+        <p:cNvGrpSpPr/>
+        <p:nvPr/>
+      </p:nvGrpSpPr>
+      <p:grpSpPr/>
+      <p:sp>
+        <p:nvSpPr>
+          <p:cNvPr id="2" name="Rectangle 1"/>
+          <p:cNvSpPr/>
+          <p:nvPr/>
+        </p:nvSpPr>
+        <p:spPr>
+          <a:xfrm>
+            <a:off x="0" y="0"/>
+            <a:ext cx="12191695" cy="777240"/>
+          </a:xfrm>
+          <a:prstGeom prst="rect">
+            <a:avLst/>
+          </a:prstGeom>
+          <a:solidFill/>
+        </p:spPr>
+        <p:style>
+          <a:lnRef idx="1">
+            <a:schemeClr val="accent1"/>
+          </a:lnRef>
+          <a:fillRef idx="3">
+            <a:schemeClr val="accent1"/>
+          </a:fillRef>
+          <a:effectRef idx="2">
+            <a:schemeClr val="accent1"/>
+          </a:effectRef>
+          <a:fontRef idx="minor">
+            <a:schemeClr val="lt1"/>
+          </a:fontRef>
+        </p:style>
+        <p:txBody>
+          <a:bodyPr rtlCol="0" anchor="ctr"/>
+          <a:lstStyle/>
+          <a:p>
+            <a:pPr algn="ctr"/>
+          </a:p>
+        </p:txBody>
+      </p:sp>
+      <p:sp>
+        <p:nvSpPr>
+          <p:cNvPr id="3" name="TextBox 2"/>
+          <p:cNvSpPr txBox="1"/>
+          <p:nvPr/>
+        </p:nvSpPr>
+        <p:spPr>
+          <a:xfrm>
+            <a:off x="640080" y="164592"/>
+            <a:ext cx="7772400" cy="365760"/>
+          </a:xfrm>
+          <a:prstGeom prst="rect">
+            <a:avLst/>
+          </a:prstGeom>
+          <a:noFill/>
+        </p:spPr>
+        <p:txBody>
+          <a:bodyPr wrap="none">
+            <a:spAutoFit/>
+          </a:bodyPr>
+          <a:lstStyle/>
+          <a:p>
+            <a:pPr>
+              <a:defRPr sz="2600" b="1">
+                <a:solidFill/>
+              </a:defRPr>
+            </a:pPr>
+            <a:r>
+              <a:t>4. Results and Discussion</a:t>
+            </a:r>
+          </a:p>
+        </p:txBody>
+      </p:sp>
+    </p:spTree>
+  </p:cSld>
+  <p:clrMapOvr>
+    <a:masterClrMapping/>
+  </p:clrMapOvr>
+</p:sld>
+</file>
+
+<file path=ppt/slides/slide6.xml><?xml version="1.0" encoding="utf-8"?>
+<p:sld xmlns:a="http://schemas.openxmlformats.org/drawingml/2006/main" xmlns:p="http://schemas.openxmlformats.org/presentationml/2006/main" xmlns:r="http://schemas.openxmlformats.org/officeDocument/2006/relationships">
+  <p:cSld>
+    <p:bg>
+      <p:bgPr>
+        <a:solidFill/>
+        <a:effectLst/>
+      </p:bgPr>
+    </p:bg>
+    <p:spTree>
+      <p:nvGrpSpPr>
+        <p:cNvPr id="1" name=""/>
+        <p:cNvGrpSpPr/>
+        <p:nvPr/>
+      </p:nvGrpSpPr>
+      <p:grpSpPr/>
+      <p:sp>
+        <p:nvSpPr>
+          <p:cNvPr id="2" name="Rectangle 1"/>
+          <p:cNvSpPr/>
+          <p:nvPr/>
+        </p:nvSpPr>
+        <p:spPr>
+          <a:xfrm>
+            <a:off x="0" y="0"/>
+            <a:ext cx="12191695" cy="777240"/>
+          </a:xfrm>
+          <a:prstGeom prst="rect">
+            <a:avLst/>
+          </a:prstGeom>
+          <a:solidFill/>
+        </p:spPr>
+        <p:style>
+          <a:lnRef idx="1">
+            <a:schemeClr val="accent1"/>
+          </a:lnRef>
+          <a:fillRef idx="3">
+            <a:schemeClr val="accent1"/>
+          </a:fillRef>
+          <a:effectRef idx="2">
+            <a:schemeClr val="accent1"/>
+          </a:effectRef>
+          <a:fontRef idx="minor">
+            <a:schemeClr val="lt1"/>
+          </a:fontRef>
+        </p:style>
+        <p:txBody>
+          <a:bodyPr rtlCol="0" anchor="ctr"/>
+          <a:lstStyle/>
+          <a:p>
+            <a:pPr algn="ctr"/>
+          </a:p>
+        </p:txBody>
+      </p:sp>
+      <p:sp>
+        <p:nvSpPr>
+          <p:cNvPr id="3" name="TextBox 2"/>
+          <p:cNvSpPr txBox="1"/>
+          <p:nvPr/>
+        </p:nvSpPr>
+        <p:spPr>
+          <a:xfrm>
+            <a:off x="640080" y="164592"/>
+            <a:ext cx="6858000" cy="365760"/>
+          </a:xfrm>
+          <a:prstGeom prst="rect">
+            <a:avLst/>
+          </a:prstGeom>
+          <a:noFill/>
+        </p:spPr>
+        <p:txBody>
+          <a:bodyPr wrap="none">
+            <a:spAutoFit/>
+          </a:bodyPr>
+          <a:lstStyle/>
+          <a:p>
+            <a:pPr>
+              <a:defRPr sz="2600" b="1">
+                <a:solidFill/>
+              </a:defRPr>
+            </a:pPr>
+            <a:r>
+              <a:t>5. Conclusion</a:t>
+            </a:r>
+          </a:p>
+        </p:txBody>
+      </p:sp>
+      <p:sp>
+        <p:nvSpPr>
+          <p:cNvPr id="4" name="Rectangle 3"/>
+          <p:cNvSpPr/>
+          <p:nvPr/>
+        </p:nvSpPr>
+        <p:spPr>
+          <a:xfrm>
+            <a:off x="914400" y="1371600"/>
+            <a:ext cx="10241280" cy="3383280"/>
+          </a:xfrm>
+          <a:prstGeom prst="rect">
+            <a:avLst/>
+          </a:prstGeom>
+          <a:solidFill/>
           <a:ln>
-            <a:solidFill>
-              <a:srgbClr val="0066CC"/>
-            </a:solidFill>
+            <a:solidFill/>
           </a:ln>
         </p:spPr>
         <p:style>
@@ -3452,2009 +3846,16 @@
           </a:fontRef>
         </p:style>
         <p:txBody>
-          <a:bodyPr rtlCol="0" anchor="ctr" wrap="square"/>
+          <a:bodyPr rtlCol="0" anchor="ctr"/>
           <a:lstStyle/>
           <a:p>
             <a:pPr algn="ctr">
-              <a:defRPr sz="2400" b="1">
-                <a:solidFill>
-                  <a:srgbClr val="0066CC"/>
-                </a:solidFill>
+              <a:defRPr sz="2000">
+                <a:solidFill/>
               </a:defRPr>
             </a:pPr>
             <a:r>
-              <a:t>7</a:t>
-            </a:r>
-          </a:p>
-          <a:p>
-            <a:pPr algn="ctr">
-              <a:defRPr sz="1100">
-                <a:solidFill>
-                  <a:srgbClr val="586069"/>
-                </a:solidFill>
-              </a:defRPr>
-            </a:pPr>
-            <a:r>
-              <a:t>Key decision stages</a:t>
-            </a:r>
-          </a:p>
-        </p:txBody>
-      </p:sp>
-      <p:sp>
-        <p:nvSpPr>
-          <p:cNvPr id="9" name="TextBox 8"/>
-          <p:cNvSpPr txBox="1"/>
-          <p:nvPr/>
-        </p:nvSpPr>
-        <p:spPr>
-          <a:xfrm>
-            <a:off x="731520" y="6217920"/>
-            <a:ext cx="9601200" cy="365760"/>
-          </a:xfrm>
-          <a:prstGeom prst="rect">
-            <a:avLst/>
-          </a:prstGeom>
-          <a:noFill/>
-        </p:spPr>
-        <p:txBody>
-          <a:bodyPr wrap="none">
-            <a:spAutoFit/>
-          </a:bodyPr>
-          <a:lstStyle/>
-          <a:p>
-            <a:pPr>
-              <a:defRPr sz="1100">
-                <a:solidFill>
-                  <a:srgbClr val="586069"/>
-                </a:solidFill>
-              </a:defRPr>
-            </a:pPr>
-            <a:r>
-              <a:t>Built for Contoso Insurance motor claims: evidence -&gt; extraction -&gt; rules -&gt; grounded summary -&gt; human decision</a:t>
-            </a:r>
-          </a:p>
-        </p:txBody>
-      </p:sp>
-    </p:spTree>
-  </p:cSld>
-  <p:clrMapOvr>
-    <a:masterClrMapping/>
-  </p:clrMapOvr>
-</p:sld>
-</file>
-
-<file path=ppt/slides/slide2.xml><?xml version="1.0" encoding="utf-8"?>
-<p:sld xmlns:a="http://schemas.openxmlformats.org/drawingml/2006/main" xmlns:p="http://schemas.openxmlformats.org/presentationml/2006/main" xmlns:r="http://schemas.openxmlformats.org/officeDocument/2006/relationships">
-  <p:cSld>
-    <p:spTree>
-      <p:nvGrpSpPr>
-        <p:cNvPr id="1" name=""/>
-        <p:cNvGrpSpPr/>
-        <p:nvPr/>
-      </p:nvGrpSpPr>
-      <p:grpSpPr/>
-      <p:sp>
-        <p:nvSpPr>
-          <p:cNvPr id="2" name="TextBox 1"/>
-          <p:cNvSpPr txBox="1"/>
-          <p:nvPr/>
-        </p:nvSpPr>
-        <p:spPr>
-          <a:xfrm>
-            <a:off x="457200" y="320040"/>
-            <a:ext cx="10972800" cy="640080"/>
-          </a:xfrm>
-          <a:prstGeom prst="rect">
-            <a:avLst/>
-          </a:prstGeom>
-          <a:noFill/>
-        </p:spPr>
-        <p:txBody>
-          <a:bodyPr wrap="none">
-            <a:spAutoFit/>
-          </a:bodyPr>
-          <a:lstStyle/>
-          <a:p>
-            <a:pPr>
-              <a:defRPr sz="2800" b="1">
-                <a:solidFill>
-                  <a:srgbClr val="0C2245"/>
-                </a:solidFill>
-              </a:defRPr>
-            </a:pPr>
-            <a:r>
-              <a:t>Business problem</a:t>
-            </a:r>
-          </a:p>
-        </p:txBody>
-      </p:sp>
-      <p:sp>
-        <p:nvSpPr>
-          <p:cNvPr id="3" name="TextBox 2"/>
-          <p:cNvSpPr txBox="1"/>
-          <p:nvPr/>
-        </p:nvSpPr>
-        <p:spPr>
-          <a:xfrm>
-            <a:off x="502920" y="914400"/>
-            <a:ext cx="10515600" cy="457200"/>
-          </a:xfrm>
-          <a:prstGeom prst="rect">
-            <a:avLst/>
-          </a:prstGeom>
-          <a:noFill/>
-        </p:spPr>
-        <p:txBody>
-          <a:bodyPr wrap="none">
-            <a:spAutoFit/>
-          </a:bodyPr>
-          <a:lstStyle/>
-          <a:p>
-            <a:pPr>
-              <a:defRPr sz="1300">
-                <a:solidFill>
-                  <a:srgbClr val="586069"/>
-                </a:solidFill>
-              </a:defRPr>
-            </a:pPr>
-            <a:r>
-              <a:t>Claims handlers need audit-ready evidence, not a black-box verdict.</a:t>
-            </a:r>
-          </a:p>
-        </p:txBody>
-      </p:sp>
-      <p:sp>
-        <p:nvSpPr>
-          <p:cNvPr id="4" name="TextBox 3"/>
-          <p:cNvSpPr txBox="1"/>
-          <p:nvPr/>
-        </p:nvSpPr>
-        <p:spPr>
-          <a:xfrm>
-            <a:off x="731520" y="1371600"/>
-            <a:ext cx="5120640" cy="3474720"/>
-          </a:xfrm>
-          <a:prstGeom prst="rect">
-            <a:avLst/>
-          </a:prstGeom>
-          <a:noFill/>
-        </p:spPr>
-        <p:txBody>
-          <a:bodyPr wrap="none">
-            <a:spAutoFit/>
-          </a:bodyPr>
-          <a:lstStyle/>
-          <a:p>
-            <a:pPr>
-              <a:defRPr sz="1800">
-                <a:solidFill>
-                  <a:srgbClr val="0C2245"/>
-                </a:solidFill>
-              </a:defRPr>
-            </a:pPr>
-            <a:r>
-              <a:t>• Mixed evidence: claim forms, police reports, repair estimates, customer statements, policy schedules, and photos</a:t>
-            </a:r>
-          </a:p>
-          <a:p>
-            <a:pPr>
-              <a:defRPr sz="1800">
-                <a:solidFill>
-                  <a:srgbClr val="0C2245"/>
-                </a:solidFill>
-              </a:defRPr>
-            </a:pPr>
-            <a:r>
-              <a:t>• Claims must be checked against policy rules and not decided by guesswork</a:t>
-            </a:r>
-          </a:p>
-          <a:p>
-            <a:pPr>
-              <a:defRPr sz="1800">
-                <a:solidFill>
-                  <a:srgbClr val="0C2245"/>
-                </a:solidFill>
-              </a:defRPr>
-            </a:pPr>
-            <a:r>
-              <a:t>• A handler needs traceable evidence and a safe recommendation boundary</a:t>
-            </a:r>
-          </a:p>
-          <a:p>
-            <a:pPr>
-              <a:defRPr sz="1800">
-                <a:solidFill>
-                  <a:srgbClr val="0C2245"/>
-                </a:solidFill>
-              </a:defRPr>
-            </a:pPr>
-            <a:r>
-              <a:t>• Fraud and policy exceptions must be surfaced early without inventing conclusions</a:t>
-            </a:r>
-          </a:p>
-          <a:p>
-            <a:pPr>
-              <a:defRPr sz="1800">
-                <a:solidFill>
-                  <a:srgbClr val="0C2245"/>
-                </a:solidFill>
-              </a:defRPr>
-            </a:pPr>
-            <a:r>
-              <a:t>• The business goal is faster, more consistent, auditable triage</a:t>
-            </a:r>
-          </a:p>
-        </p:txBody>
-      </p:sp>
-      <p:sp>
-        <p:nvSpPr>
-          <p:cNvPr id="5" name="Rectangle 4"/>
-          <p:cNvSpPr/>
-          <p:nvPr/>
-        </p:nvSpPr>
-        <p:spPr>
-          <a:xfrm>
-            <a:off x="6492240" y="1463040"/>
-            <a:ext cx="4389120" cy="2560320"/>
-          </a:xfrm>
-          <a:prstGeom prst="rect">
-            <a:avLst/>
-          </a:prstGeom>
-          <a:solidFill>
-            <a:srgbClr val="F5F7FA"/>
-          </a:solidFill>
-          <a:ln>
-            <a:solidFill>
-              <a:srgbClr val="0066CC"/>
-            </a:solidFill>
-          </a:ln>
-        </p:spPr>
-        <p:style>
-          <a:lnRef idx="1">
-            <a:schemeClr val="accent1"/>
-          </a:lnRef>
-          <a:fillRef idx="3">
-            <a:schemeClr val="accent1"/>
-          </a:fillRef>
-          <a:effectRef idx="2">
-            <a:schemeClr val="accent1"/>
-          </a:effectRef>
-          <a:fontRef idx="minor">
-            <a:schemeClr val="lt1"/>
-          </a:fontRef>
-        </p:style>
-        <p:txBody>
-          <a:bodyPr rtlCol="0" anchor="ctr" wrap="square"/>
-          <a:lstStyle/>
-          <a:p>
-            <a:pPr algn="ctr">
-              <a:defRPr sz="2000" b="1">
-                <a:solidFill>
-                  <a:srgbClr val="0C2245"/>
-                </a:solidFill>
-              </a:defRPr>
-            </a:pPr>
-            <a:r>
-              <a:t>Outcome delivered</a:t>
-            </a:r>
-          </a:p>
-          <a:p>
-            <a:pPr>
-              <a:defRPr sz="1500" b="0">
-                <a:solidFill>
-                  <a:srgbClr val="586069"/>
-                </a:solidFill>
-              </a:defRPr>
-            </a:pPr>
-            <a:r>
-              <a:t>• Human-safe workflow</a:t>
-            </a:r>
-          </a:p>
-          <a:p>
-            <a:pPr>
-              <a:defRPr sz="1500" b="0">
-                <a:solidFill>
-                  <a:srgbClr val="586069"/>
-                </a:solidFill>
-              </a:defRPr>
-            </a:pPr>
-            <a:r>
-              <a:t>• Auditable source links</a:t>
-            </a:r>
-          </a:p>
-          <a:p>
-            <a:pPr>
-              <a:defRPr sz="1500" b="0">
-                <a:solidFill>
-                  <a:srgbClr val="586069"/>
-                </a:solidFill>
-              </a:defRPr>
-            </a:pPr>
-            <a:r>
-              <a:t>• Policy-grounded explanations</a:t>
-            </a:r>
-          </a:p>
-          <a:p>
-            <a:pPr>
-              <a:defRPr sz="1500" b="0">
-                <a:solidFill>
-                  <a:srgbClr val="586069"/>
-                </a:solidFill>
-              </a:defRPr>
-            </a:pPr>
-            <a:r>
-              <a:t>• Recommendations: proceed / request_information / refer</a:t>
-            </a:r>
-          </a:p>
-          <a:p>
-            <a:pPr>
-              <a:defRPr sz="1500" b="0">
-                <a:solidFill>
-                  <a:srgbClr val="586069"/>
-                </a:solidFill>
-              </a:defRPr>
-            </a:pPr>
-            <a:r>
-              <a:t>• No unsafe approve/decline/payment decisions</a:t>
-            </a:r>
-          </a:p>
-        </p:txBody>
-      </p:sp>
-    </p:spTree>
-  </p:cSld>
-  <p:clrMapOvr>
-    <a:masterClrMapping/>
-  </p:clrMapOvr>
-</p:sld>
-</file>
-
-<file path=ppt/slides/slide3.xml><?xml version="1.0" encoding="utf-8"?>
-<p:sld xmlns:a="http://schemas.openxmlformats.org/drawingml/2006/main" xmlns:p="http://schemas.openxmlformats.org/presentationml/2006/main" xmlns:r="http://schemas.openxmlformats.org/officeDocument/2006/relationships">
-  <p:cSld>
-    <p:spTree>
-      <p:nvGrpSpPr>
-        <p:cNvPr id="1" name=""/>
-        <p:cNvGrpSpPr/>
-        <p:nvPr/>
-      </p:nvGrpSpPr>
-      <p:grpSpPr/>
-      <p:sp>
-        <p:nvSpPr>
-          <p:cNvPr id="2" name="TextBox 1"/>
-          <p:cNvSpPr txBox="1"/>
-          <p:nvPr/>
-        </p:nvSpPr>
-        <p:spPr>
-          <a:xfrm>
-            <a:off x="457200" y="320040"/>
-            <a:ext cx="10972800" cy="640080"/>
-          </a:xfrm>
-          <a:prstGeom prst="rect">
-            <a:avLst/>
-          </a:prstGeom>
-          <a:noFill/>
-        </p:spPr>
-        <p:txBody>
-          <a:bodyPr wrap="none">
-            <a:spAutoFit/>
-          </a:bodyPr>
-          <a:lstStyle/>
-          <a:p>
-            <a:pPr>
-              <a:defRPr sz="2800" b="1">
-                <a:solidFill>
-                  <a:srgbClr val="0C2245"/>
-                </a:solidFill>
-              </a:defRPr>
-            </a:pPr>
-            <a:r>
-              <a:t>Solution architecture</a:t>
-            </a:r>
-          </a:p>
-        </p:txBody>
-      </p:sp>
-      <p:sp>
-        <p:nvSpPr>
-          <p:cNvPr id="3" name="TextBox 2"/>
-          <p:cNvSpPr txBox="1"/>
-          <p:nvPr/>
-        </p:nvSpPr>
-        <p:spPr>
-          <a:xfrm>
-            <a:off x="502920" y="914400"/>
-            <a:ext cx="10515600" cy="457200"/>
-          </a:xfrm>
-          <a:prstGeom prst="rect">
-            <a:avLst/>
-          </a:prstGeom>
-          <a:noFill/>
-        </p:spPr>
-        <p:txBody>
-          <a:bodyPr wrap="none">
-            <a:spAutoFit/>
-          </a:bodyPr>
-          <a:lstStyle/>
-          <a:p>
-            <a:pPr>
-              <a:defRPr sz="1300">
-                <a:solidFill>
-                  <a:srgbClr val="586069"/>
-                </a:solidFill>
-              </a:defRPr>
-            </a:pPr>
-            <a:r>
-              <a:t>Evidence in -&gt; structured findings out</a:t>
-            </a:r>
-          </a:p>
-        </p:txBody>
-      </p:sp>
-      <p:sp>
-        <p:nvSpPr>
-          <p:cNvPr id="4" name="Rectangle 3"/>
-          <p:cNvSpPr/>
-          <p:nvPr/>
-        </p:nvSpPr>
-        <p:spPr>
-          <a:xfrm>
-            <a:off x="548640" y="1828800"/>
-            <a:ext cx="1737360" cy="1645920"/>
-          </a:xfrm>
-          <a:prstGeom prst="rect">
-            <a:avLst/>
-          </a:prstGeom>
-          <a:solidFill>
-            <a:srgbClr val="F5F7FA"/>
-          </a:solidFill>
-          <a:ln>
-            <a:solidFill>
-              <a:srgbClr val="0066CC"/>
-            </a:solidFill>
-          </a:ln>
-        </p:spPr>
-        <p:style>
-          <a:lnRef idx="1">
-            <a:schemeClr val="accent1"/>
-          </a:lnRef>
-          <a:fillRef idx="3">
-            <a:schemeClr val="accent1"/>
-          </a:fillRef>
-          <a:effectRef idx="2">
-            <a:schemeClr val="accent1"/>
-          </a:effectRef>
-          <a:fontRef idx="minor">
-            <a:schemeClr val="lt1"/>
-          </a:fontRef>
-        </p:style>
-        <p:txBody>
-          <a:bodyPr rtlCol="0" anchor="ctr" wrap="square"/>
-          <a:lstStyle/>
-          <a:p>
-            <a:pPr algn="ctr">
-              <a:defRPr b="1" sz="1600">
-                <a:solidFill>
-                  <a:srgbClr val="0C2245"/>
-                </a:solidFill>
-              </a:defRPr>
-            </a:pPr>
-            <a:r>
-              <a:t>1. Intake</a:t>
-            </a:r>
-          </a:p>
-          <a:p>
-            <a:pPr>
-              <a:defRPr sz="1200">
-                <a:solidFill>
-                  <a:srgbClr val="586069"/>
-                </a:solidFill>
-              </a:defRPr>
-            </a:pPr>
-            <a:r>
-              <a:t>Claim PDFs + photos</a:t>
-            </a:r>
-          </a:p>
-        </p:txBody>
-      </p:sp>
-      <p:sp>
-        <p:nvSpPr>
-          <p:cNvPr id="5" name="Rectangle 4"/>
-          <p:cNvSpPr/>
-          <p:nvPr/>
-        </p:nvSpPr>
-        <p:spPr>
-          <a:xfrm>
-            <a:off x="2468880" y="1828800"/>
-            <a:ext cx="1737360" cy="1645920"/>
-          </a:xfrm>
-          <a:prstGeom prst="rect">
-            <a:avLst/>
-          </a:prstGeom>
-          <a:solidFill>
-            <a:srgbClr val="F5F7FA"/>
-          </a:solidFill>
-          <a:ln>
-            <a:solidFill>
-              <a:srgbClr val="009999"/>
-            </a:solidFill>
-          </a:ln>
-        </p:spPr>
-        <p:style>
-          <a:lnRef idx="1">
-            <a:schemeClr val="accent1"/>
-          </a:lnRef>
-          <a:fillRef idx="3">
-            <a:schemeClr val="accent1"/>
-          </a:fillRef>
-          <a:effectRef idx="2">
-            <a:schemeClr val="accent1"/>
-          </a:effectRef>
-          <a:fontRef idx="minor">
-            <a:schemeClr val="lt1"/>
-          </a:fontRef>
-        </p:style>
-        <p:txBody>
-          <a:bodyPr rtlCol="0" anchor="ctr" wrap="square"/>
-          <a:lstStyle/>
-          <a:p>
-            <a:pPr algn="ctr">
-              <a:defRPr b="1" sz="1600">
-                <a:solidFill>
-                  <a:srgbClr val="0C2245"/>
-                </a:solidFill>
-              </a:defRPr>
-            </a:pPr>
-            <a:r>
-              <a:t>2. Extraction</a:t>
-            </a:r>
-          </a:p>
-          <a:p>
-            <a:pPr>
-              <a:defRPr sz="1200">
-                <a:solidFill>
-                  <a:srgbClr val="586069"/>
-                </a:solidFill>
-              </a:defRPr>
-            </a:pPr>
-            <a:r>
-              <a:t>Content Understanding analyzers</a:t>
-            </a:r>
-          </a:p>
-        </p:txBody>
-      </p:sp>
-      <p:sp>
-        <p:nvSpPr>
-          <p:cNvPr id="6" name="Rectangle 5"/>
-          <p:cNvSpPr/>
-          <p:nvPr/>
-        </p:nvSpPr>
-        <p:spPr>
-          <a:xfrm>
-            <a:off x="4389120" y="1828800"/>
-            <a:ext cx="1737360" cy="1645920"/>
-          </a:xfrm>
-          <a:prstGeom prst="rect">
-            <a:avLst/>
-          </a:prstGeom>
-          <a:solidFill>
-            <a:srgbClr val="F5F7FA"/>
-          </a:solidFill>
-          <a:ln>
-            <a:solidFill>
-              <a:srgbClr val="009966"/>
-            </a:solidFill>
-          </a:ln>
-        </p:spPr>
-        <p:style>
-          <a:lnRef idx="1">
-            <a:schemeClr val="accent1"/>
-          </a:lnRef>
-          <a:fillRef idx="3">
-            <a:schemeClr val="accent1"/>
-          </a:fillRef>
-          <a:effectRef idx="2">
-            <a:schemeClr val="accent1"/>
-          </a:effectRef>
-          <a:fontRef idx="minor">
-            <a:schemeClr val="lt1"/>
-          </a:fontRef>
-        </p:style>
-        <p:txBody>
-          <a:bodyPr rtlCol="0" anchor="ctr" wrap="square"/>
-          <a:lstStyle/>
-          <a:p>
-            <a:pPr algn="ctr">
-              <a:defRPr b="1" sz="1600">
-                <a:solidFill>
-                  <a:srgbClr val="0C2245"/>
-                </a:solidFill>
-              </a:defRPr>
-            </a:pPr>
-            <a:r>
-              <a:t>3. Photo analysis</a:t>
-            </a:r>
-          </a:p>
-          <a:p>
-            <a:pPr>
-              <a:defRPr sz="1200">
-                <a:solidFill>
-                  <a:srgbClr val="586069"/>
-                </a:solidFill>
-              </a:defRPr>
-            </a:pPr>
-            <a:r>
-              <a:t>Visible damage + repair band</a:t>
-            </a:r>
-          </a:p>
-        </p:txBody>
-      </p:sp>
-      <p:sp>
-        <p:nvSpPr>
-          <p:cNvPr id="7" name="Rectangle 6"/>
-          <p:cNvSpPr/>
-          <p:nvPr/>
-        </p:nvSpPr>
-        <p:spPr>
-          <a:xfrm>
-            <a:off x="6309360" y="1828800"/>
-            <a:ext cx="1737360" cy="1645920"/>
-          </a:xfrm>
-          <a:prstGeom prst="rect">
-            <a:avLst/>
-          </a:prstGeom>
-          <a:solidFill>
-            <a:srgbClr val="F5F7FA"/>
-          </a:solidFill>
-          <a:ln>
-            <a:solidFill>
-              <a:srgbClr val="0C2245"/>
-            </a:solidFill>
-          </a:ln>
-        </p:spPr>
-        <p:style>
-          <a:lnRef idx="1">
-            <a:schemeClr val="accent1"/>
-          </a:lnRef>
-          <a:fillRef idx="3">
-            <a:schemeClr val="accent1"/>
-          </a:fillRef>
-          <a:effectRef idx="2">
-            <a:schemeClr val="accent1"/>
-          </a:effectRef>
-          <a:fontRef idx="minor">
-            <a:schemeClr val="lt1"/>
-          </a:fontRef>
-        </p:style>
-        <p:txBody>
-          <a:bodyPr rtlCol="0" anchor="ctr" wrap="square"/>
-          <a:lstStyle/>
-          <a:p>
-            <a:pPr algn="ctr">
-              <a:defRPr b="1" sz="1600">
-                <a:solidFill>
-                  <a:srgbClr val="0C2245"/>
-                </a:solidFill>
-              </a:defRPr>
-            </a:pPr>
-            <a:r>
-              <a:t>4. Rules engine</a:t>
-            </a:r>
-          </a:p>
-          <a:p>
-            <a:pPr>
-              <a:defRPr sz="1200">
-                <a:solidFill>
-                  <a:srgbClr val="586069"/>
-                </a:solidFill>
-              </a:defRPr>
-            </a:pPr>
-            <a:r>
-              <a:t>Dates, mismatches, cover, authority, policy checks</a:t>
-            </a:r>
-          </a:p>
-        </p:txBody>
-      </p:sp>
-      <p:sp>
-        <p:nvSpPr>
-          <p:cNvPr id="8" name="Rectangle 7"/>
-          <p:cNvSpPr/>
-          <p:nvPr/>
-        </p:nvSpPr>
-        <p:spPr>
-          <a:xfrm>
-            <a:off x="8229600" y="1828800"/>
-            <a:ext cx="1737360" cy="1645920"/>
-          </a:xfrm>
-          <a:prstGeom prst="rect">
-            <a:avLst/>
-          </a:prstGeom>
-          <a:solidFill>
-            <a:srgbClr val="F5F7FA"/>
-          </a:solidFill>
-          <a:ln>
-            <a:solidFill>
-              <a:srgbClr val="0066CC"/>
-            </a:solidFill>
-          </a:ln>
-        </p:spPr>
-        <p:style>
-          <a:lnRef idx="1">
-            <a:schemeClr val="accent1"/>
-          </a:lnRef>
-          <a:fillRef idx="3">
-            <a:schemeClr val="accent1"/>
-          </a:fillRef>
-          <a:effectRef idx="2">
-            <a:schemeClr val="accent1"/>
-          </a:effectRef>
-          <a:fontRef idx="minor">
-            <a:schemeClr val="lt1"/>
-          </a:fontRef>
-        </p:style>
-        <p:txBody>
-          <a:bodyPr rtlCol="0" anchor="ctr" wrap="square"/>
-          <a:lstStyle/>
-          <a:p>
-            <a:pPr algn="ctr">
-              <a:defRPr b="1" sz="1600">
-                <a:solidFill>
-                  <a:srgbClr val="0C2245"/>
-                </a:solidFill>
-              </a:defRPr>
-            </a:pPr>
-            <a:r>
-              <a:t>5. Grounded agent</a:t>
-            </a:r>
-          </a:p>
-          <a:p>
-            <a:pPr>
-              <a:defRPr sz="1200">
-                <a:solidFill>
-                  <a:srgbClr val="586069"/>
-                </a:solidFill>
-              </a:defRPr>
-            </a:pPr>
-            <a:r>
-              <a:t>Policy KB + summary + recommendation</a:t>
-            </a:r>
-          </a:p>
-        </p:txBody>
-      </p:sp>
-      <p:sp>
-        <p:nvSpPr>
-          <p:cNvPr id="9" name="Rectangle 8"/>
-          <p:cNvSpPr/>
-          <p:nvPr/>
-        </p:nvSpPr>
-        <p:spPr>
-          <a:xfrm>
-            <a:off x="10149840" y="1828800"/>
-            <a:ext cx="1737360" cy="1645920"/>
-          </a:xfrm>
-          <a:prstGeom prst="rect">
-            <a:avLst/>
-          </a:prstGeom>
-          <a:solidFill>
-            <a:srgbClr val="F5F7FA"/>
-          </a:solidFill>
-          <a:ln>
-            <a:solidFill>
-              <a:srgbClr val="586069"/>
-            </a:solidFill>
-          </a:ln>
-        </p:spPr>
-        <p:style>
-          <a:lnRef idx="1">
-            <a:schemeClr val="accent1"/>
-          </a:lnRef>
-          <a:fillRef idx="3">
-            <a:schemeClr val="accent1"/>
-          </a:fillRef>
-          <a:effectRef idx="2">
-            <a:schemeClr val="accent1"/>
-          </a:effectRef>
-          <a:fontRef idx="minor">
-            <a:schemeClr val="lt1"/>
-          </a:fontRef>
-        </p:style>
-        <p:txBody>
-          <a:bodyPr rtlCol="0" anchor="ctr" wrap="square"/>
-          <a:lstStyle/>
-          <a:p>
-            <a:pPr algn="ctr">
-              <a:defRPr b="1" sz="1600">
-                <a:solidFill>
-                  <a:srgbClr val="0C2245"/>
-                </a:solidFill>
-              </a:defRPr>
-            </a:pPr>
-            <a:r>
-              <a:t>6. Human handler</a:t>
-            </a:r>
-          </a:p>
-          <a:p>
-            <a:pPr>
-              <a:defRPr sz="1200">
-                <a:solidFill>
-                  <a:srgbClr val="586069"/>
-                </a:solidFill>
-              </a:defRPr>
-            </a:pPr>
-            <a:r>
-              <a:t>Accept / amend / reject with note</a:t>
-            </a:r>
-          </a:p>
-        </p:txBody>
-      </p:sp>
-      <p:cxnSp>
-        <p:nvCxnSpPr>
-          <p:cNvPr id="10" name="Connector 9"/>
-          <p:cNvCxnSpPr/>
-          <p:nvPr/>
-        </p:nvCxnSpPr>
-        <p:spPr>
-          <a:xfrm>
-            <a:off x="2286000" y="3474720"/>
-            <a:ext cx="365760" cy="0"/>
-          </a:xfrm>
-          <a:prstGeom prst="line">
-            <a:avLst/>
-          </a:prstGeom>
-          <a:ln w="25400">
-            <a:solidFill>
-              <a:srgbClr val="0066CC"/>
-            </a:solidFill>
-          </a:ln>
-        </p:spPr>
-        <p:style>
-          <a:lnRef idx="2">
-            <a:schemeClr val="accent1"/>
-          </a:lnRef>
-          <a:fillRef idx="0">
-            <a:schemeClr val="accent1"/>
-          </a:fillRef>
-          <a:effectRef idx="1">
-            <a:schemeClr val="accent1"/>
-          </a:effectRef>
-          <a:fontRef idx="minor">
-            <a:schemeClr val="tx1"/>
-          </a:fontRef>
-        </p:style>
-      </p:cxnSp>
-      <p:cxnSp>
-        <p:nvCxnSpPr>
-          <p:cNvPr id="11" name="Connector 10"/>
-          <p:cNvCxnSpPr/>
-          <p:nvPr/>
-        </p:nvCxnSpPr>
-        <p:spPr>
-          <a:xfrm>
-            <a:off x="4206240" y="3474720"/>
-            <a:ext cx="365760" cy="0"/>
-          </a:xfrm>
-          <a:prstGeom prst="line">
-            <a:avLst/>
-          </a:prstGeom>
-          <a:ln w="25400">
-            <a:solidFill>
-              <a:srgbClr val="0066CC"/>
-            </a:solidFill>
-          </a:ln>
-        </p:spPr>
-        <p:style>
-          <a:lnRef idx="2">
-            <a:schemeClr val="accent1"/>
-          </a:lnRef>
-          <a:fillRef idx="0">
-            <a:schemeClr val="accent1"/>
-          </a:fillRef>
-          <a:effectRef idx="1">
-            <a:schemeClr val="accent1"/>
-          </a:effectRef>
-          <a:fontRef idx="minor">
-            <a:schemeClr val="tx1"/>
-          </a:fontRef>
-        </p:style>
-      </p:cxnSp>
-      <p:cxnSp>
-        <p:nvCxnSpPr>
-          <p:cNvPr id="12" name="Connector 11"/>
-          <p:cNvCxnSpPr/>
-          <p:nvPr/>
-        </p:nvCxnSpPr>
-        <p:spPr>
-          <a:xfrm>
-            <a:off x="6126480" y="3474720"/>
-            <a:ext cx="365760" cy="0"/>
-          </a:xfrm>
-          <a:prstGeom prst="line">
-            <a:avLst/>
-          </a:prstGeom>
-          <a:ln w="25400">
-            <a:solidFill>
-              <a:srgbClr val="0066CC"/>
-            </a:solidFill>
-          </a:ln>
-        </p:spPr>
-        <p:style>
-          <a:lnRef idx="2">
-            <a:schemeClr val="accent1"/>
-          </a:lnRef>
-          <a:fillRef idx="0">
-            <a:schemeClr val="accent1"/>
-          </a:fillRef>
-          <a:effectRef idx="1">
-            <a:schemeClr val="accent1"/>
-          </a:effectRef>
-          <a:fontRef idx="minor">
-            <a:schemeClr val="tx1"/>
-          </a:fontRef>
-        </p:style>
-      </p:cxnSp>
-      <p:cxnSp>
-        <p:nvCxnSpPr>
-          <p:cNvPr id="13" name="Connector 12"/>
-          <p:cNvCxnSpPr/>
-          <p:nvPr/>
-        </p:nvCxnSpPr>
-        <p:spPr>
-          <a:xfrm>
-            <a:off x="8046720" y="3474720"/>
-            <a:ext cx="365760" cy="0"/>
-          </a:xfrm>
-          <a:prstGeom prst="line">
-            <a:avLst/>
-          </a:prstGeom>
-          <a:ln w="25400">
-            <a:solidFill>
-              <a:srgbClr val="0066CC"/>
-            </a:solidFill>
-          </a:ln>
-        </p:spPr>
-        <p:style>
-          <a:lnRef idx="2">
-            <a:schemeClr val="accent1"/>
-          </a:lnRef>
-          <a:fillRef idx="0">
-            <a:schemeClr val="accent1"/>
-          </a:fillRef>
-          <a:effectRef idx="1">
-            <a:schemeClr val="accent1"/>
-          </a:effectRef>
-          <a:fontRef idx="minor">
-            <a:schemeClr val="tx1"/>
-          </a:fontRef>
-        </p:style>
-      </p:cxnSp>
-      <p:cxnSp>
-        <p:nvCxnSpPr>
-          <p:cNvPr id="14" name="Connector 13"/>
-          <p:cNvCxnSpPr/>
-          <p:nvPr/>
-        </p:nvCxnSpPr>
-        <p:spPr>
-          <a:xfrm>
-            <a:off x="9966960" y="3474720"/>
-            <a:ext cx="365760" cy="0"/>
-          </a:xfrm>
-          <a:prstGeom prst="line">
-            <a:avLst/>
-          </a:prstGeom>
-          <a:ln w="25400">
-            <a:solidFill>
-              <a:srgbClr val="0066CC"/>
-            </a:solidFill>
-          </a:ln>
-        </p:spPr>
-        <p:style>
-          <a:lnRef idx="2">
-            <a:schemeClr val="accent1"/>
-          </a:lnRef>
-          <a:fillRef idx="0">
-            <a:schemeClr val="accent1"/>
-          </a:fillRef>
-          <a:effectRef idx="1">
-            <a:schemeClr val="accent1"/>
-          </a:effectRef>
-          <a:fontRef idx="minor">
-            <a:schemeClr val="tx1"/>
-          </a:fontRef>
-        </p:style>
-      </p:cxnSp>
-    </p:spTree>
-  </p:cSld>
-  <p:clrMapOvr>
-    <a:masterClrMapping/>
-  </p:clrMapOvr>
-</p:sld>
-</file>
-
-<file path=ppt/slides/slide4.xml><?xml version="1.0" encoding="utf-8"?>
-<p:sld xmlns:a="http://schemas.openxmlformats.org/drawingml/2006/main" xmlns:p="http://schemas.openxmlformats.org/presentationml/2006/main" xmlns:r="http://schemas.openxmlformats.org/officeDocument/2006/relationships">
-  <p:cSld>
-    <p:spTree>
-      <p:nvGrpSpPr>
-        <p:cNvPr id="1" name=""/>
-        <p:cNvGrpSpPr/>
-        <p:nvPr/>
-      </p:nvGrpSpPr>
-      <p:grpSpPr/>
-      <p:sp>
-        <p:nvSpPr>
-          <p:cNvPr id="2" name="TextBox 1"/>
-          <p:cNvSpPr txBox="1"/>
-          <p:nvPr/>
-        </p:nvSpPr>
-        <p:spPr>
-          <a:xfrm>
-            <a:off x="457200" y="320040"/>
-            <a:ext cx="10972800" cy="640080"/>
-          </a:xfrm>
-          <a:prstGeom prst="rect">
-            <a:avLst/>
-          </a:prstGeom>
-          <a:noFill/>
-        </p:spPr>
-        <p:txBody>
-          <a:bodyPr wrap="none">
-            <a:spAutoFit/>
-          </a:bodyPr>
-          <a:lstStyle/>
-          <a:p>
-            <a:pPr>
-              <a:defRPr sz="2800" b="1">
-                <a:solidFill>
-                  <a:srgbClr val="0C2245"/>
-                </a:solidFill>
-              </a:defRPr>
-            </a:pPr>
-            <a:r>
-              <a:t>What was implemented</a:t>
-            </a:r>
-          </a:p>
-        </p:txBody>
-      </p:sp>
-      <p:sp>
-        <p:nvSpPr>
-          <p:cNvPr id="3" name="TextBox 2"/>
-          <p:cNvSpPr txBox="1"/>
-          <p:nvPr/>
-        </p:nvSpPr>
-        <p:spPr>
-          <a:xfrm>
-            <a:off x="502920" y="914400"/>
-            <a:ext cx="10515600" cy="457200"/>
-          </a:xfrm>
-          <a:prstGeom prst="rect">
-            <a:avLst/>
-          </a:prstGeom>
-          <a:noFill/>
-        </p:spPr>
-        <p:txBody>
-          <a:bodyPr wrap="none">
-            <a:spAutoFit/>
-          </a:bodyPr>
-          <a:lstStyle/>
-          <a:p>
-            <a:pPr>
-              <a:defRPr sz="1300">
-                <a:solidFill>
-                  <a:srgbClr val="586069"/>
-                </a:solidFill>
-              </a:defRPr>
-            </a:pPr>
-            <a:r>
-              <a:t>The core project modules and their purpose</a:t>
-            </a:r>
-          </a:p>
-        </p:txBody>
-      </p:sp>
-      <p:sp>
-        <p:nvSpPr>
-          <p:cNvPr id="4" name="TextBox 3"/>
-          <p:cNvSpPr txBox="1"/>
-          <p:nvPr/>
-        </p:nvSpPr>
-        <p:spPr>
-          <a:xfrm>
-            <a:off x="640080" y="1371600"/>
-            <a:ext cx="5486400" cy="4114800"/>
-          </a:xfrm>
-          <a:prstGeom prst="rect">
-            <a:avLst/>
-          </a:prstGeom>
-          <a:noFill/>
-        </p:spPr>
-        <p:txBody>
-          <a:bodyPr wrap="none">
-            <a:spAutoFit/>
-          </a:bodyPr>
-          <a:lstStyle/>
-          <a:p>
-            <a:pPr>
-              <a:defRPr sz="1700">
-                <a:solidFill>
-                  <a:srgbClr val="0C2245"/>
-                </a:solidFill>
-              </a:defRPr>
-            </a:pPr>
-            <a:r>
-              <a:t>• backend/analyzers.py: claim form schema with structured extraction fields</a:t>
-            </a:r>
-          </a:p>
-          <a:p>
-            <a:pPr>
-              <a:defRPr sz="1700">
-                <a:solidFill>
-                  <a:srgbClr val="0C2245"/>
-                </a:solidFill>
-              </a:defRPr>
-            </a:pPr>
-            <a:r>
-              <a:t>• backend/vision.py: conservative photo assessment instructions and repair-band mapping</a:t>
-            </a:r>
-          </a:p>
-          <a:p>
-            <a:pPr>
-              <a:defRPr sz="1700">
-                <a:solidFill>
-                  <a:srgbClr val="0C2245"/>
-                </a:solidFill>
-              </a:defRPr>
-            </a:pPr>
-            <a:r>
-              <a:t>• backend/validation.py: date, damage-location, and estimate-vs-photo checks</a:t>
-            </a:r>
-          </a:p>
-          <a:p>
-            <a:pPr>
-              <a:defRPr sz="1700">
-                <a:solidFill>
-                  <a:srgbClr val="0C2245"/>
-                </a:solidFill>
-              </a:defRPr>
-            </a:pPr>
-            <a:r>
-              <a:t>• backend/claims_agent.py: grounded agent instructions with safety boundary and recommendation precedence</a:t>
-            </a:r>
-          </a:p>
-          <a:p>
-            <a:pPr>
-              <a:defRPr sz="1700">
-                <a:solidFill>
-                  <a:srgbClr val="0C2245"/>
-                </a:solidFill>
-              </a:defRPr>
-            </a:pPr>
-            <a:r>
-              <a:t>• backend/pipeline.py: orchestrates extraction, validation, photo assessment, and review</a:t>
-            </a:r>
-          </a:p>
-          <a:p>
-            <a:pPr>
-              <a:defRPr sz="1700">
-                <a:solidFill>
-                  <a:srgbClr val="0C2245"/>
-                </a:solidFill>
-              </a:defRPr>
-            </a:pPr>
-            <a:r>
-              <a:t>• backend/api.py + store.py: service and decision tracking for the workspace</a:t>
-            </a:r>
-          </a:p>
-        </p:txBody>
-      </p:sp>
-      <p:sp>
-        <p:nvSpPr>
-          <p:cNvPr id="5" name="Rectangle 4"/>
-          <p:cNvSpPr/>
-          <p:nvPr/>
-        </p:nvSpPr>
-        <p:spPr>
-          <a:xfrm>
-            <a:off x="6492240" y="1554480"/>
-            <a:ext cx="4389120" cy="2194560"/>
-          </a:xfrm>
-          <a:prstGeom prst="rect">
-            <a:avLst/>
-          </a:prstGeom>
-          <a:solidFill>
-            <a:srgbClr val="F5F7FA"/>
-          </a:solidFill>
-          <a:ln>
-            <a:solidFill>
-              <a:srgbClr val="009999"/>
-            </a:solidFill>
-          </a:ln>
-        </p:spPr>
-        <p:style>
-          <a:lnRef idx="1">
-            <a:schemeClr val="accent1"/>
-          </a:lnRef>
-          <a:fillRef idx="3">
-            <a:schemeClr val="accent1"/>
-          </a:fillRef>
-          <a:effectRef idx="2">
-            <a:schemeClr val="accent1"/>
-          </a:effectRef>
-          <a:fontRef idx="minor">
-            <a:schemeClr val="lt1"/>
-          </a:fontRef>
-        </p:style>
-        <p:txBody>
-          <a:bodyPr rtlCol="0" anchor="ctr"/>
-          <a:lstStyle/>
-          <a:p>
-            <a:pPr algn="ctr">
-              <a:defRPr sz="2000" b="1">
-                <a:solidFill>
-                  <a:srgbClr val="0C2245"/>
-                </a:solidFill>
-              </a:defRPr>
-            </a:pPr>
-            <a:r>
-              <a:t>Rules are deterministic</a:t>
-            </a:r>
-          </a:p>
-          <a:p>
-            <a:pPr>
-              <a:defRPr sz="1700" b="0">
-                <a:solidFill>
-                  <a:srgbClr val="0C2245"/>
-                </a:solidFill>
-              </a:defRPr>
-            </a:pPr>
-            <a:r>
-              <a:t>Policy references are explicit</a:t>
-            </a:r>
-          </a:p>
-          <a:p>
-            <a:pPr>
-              <a:defRPr sz="1700" b="0">
-                <a:solidFill>
-                  <a:srgbClr val="0C2245"/>
-                </a:solidFill>
-              </a:defRPr>
-            </a:pPr>
-            <a:r>
-              <a:t>Human review remains final</a:t>
-            </a:r>
-          </a:p>
-        </p:txBody>
-      </p:sp>
-    </p:spTree>
-  </p:cSld>
-  <p:clrMapOvr>
-    <a:masterClrMapping/>
-  </p:clrMapOvr>
-</p:sld>
-</file>
-
-<file path=ppt/slides/slide5.xml><?xml version="1.0" encoding="utf-8"?>
-<p:sld xmlns:a="http://schemas.openxmlformats.org/drawingml/2006/main" xmlns:p="http://schemas.openxmlformats.org/presentationml/2006/main" xmlns:r="http://schemas.openxmlformats.org/officeDocument/2006/relationships">
-  <p:cSld>
-    <p:spTree>
-      <p:nvGrpSpPr>
-        <p:cNvPr id="1" name=""/>
-        <p:cNvGrpSpPr/>
-        <p:nvPr/>
-      </p:nvGrpSpPr>
-      <p:grpSpPr/>
-      <p:sp>
-        <p:nvSpPr>
-          <p:cNvPr id="2" name="TextBox 1"/>
-          <p:cNvSpPr txBox="1"/>
-          <p:nvPr/>
-        </p:nvSpPr>
-        <p:spPr>
-          <a:xfrm>
-            <a:off x="457200" y="320040"/>
-            <a:ext cx="10972800" cy="640080"/>
-          </a:xfrm>
-          <a:prstGeom prst="rect">
-            <a:avLst/>
-          </a:prstGeom>
-          <a:noFill/>
-        </p:spPr>
-        <p:txBody>
-          <a:bodyPr wrap="none">
-            <a:spAutoFit/>
-          </a:bodyPr>
-          <a:lstStyle/>
-          <a:p>
-            <a:pPr>
-              <a:defRPr sz="2800" b="1">
-                <a:solidFill>
-                  <a:srgbClr val="0C2245"/>
-                </a:solidFill>
-              </a:defRPr>
-            </a:pPr>
-            <a:r>
-              <a:t>Policy and risk checks</a:t>
-            </a:r>
-          </a:p>
-        </p:txBody>
-      </p:sp>
-      <p:sp>
-        <p:nvSpPr>
-          <p:cNvPr id="3" name="TextBox 2"/>
-          <p:cNvSpPr txBox="1"/>
-          <p:nvPr/>
-        </p:nvSpPr>
-        <p:spPr>
-          <a:xfrm>
-            <a:off x="502920" y="914400"/>
-            <a:ext cx="10515600" cy="457200"/>
-          </a:xfrm>
-          <a:prstGeom prst="rect">
-            <a:avLst/>
-          </a:prstGeom>
-          <a:noFill/>
-        </p:spPr>
-        <p:txBody>
-          <a:bodyPr wrap="none">
-            <a:spAutoFit/>
-          </a:bodyPr>
-          <a:lstStyle/>
-          <a:p>
-            <a:pPr>
-              <a:defRPr sz="1300">
-                <a:solidFill>
-                  <a:srgbClr val="586069"/>
-                </a:solidFill>
-              </a:defRPr>
-            </a:pPr>
-            <a:r>
-              <a:t>The rules are deterministic and evidence-based</a:t>
-            </a:r>
-          </a:p>
-        </p:txBody>
-      </p:sp>
-      <p:sp>
-        <p:nvSpPr>
-          <p:cNvPr id="4" name="TextBox 3"/>
-          <p:cNvSpPr txBox="1"/>
-          <p:nvPr/>
-        </p:nvSpPr>
-        <p:spPr>
-          <a:xfrm>
-            <a:off x="640080" y="1371600"/>
-            <a:ext cx="5486400" cy="4389120"/>
-          </a:xfrm>
-          <a:prstGeom prst="rect">
-            <a:avLst/>
-          </a:prstGeom>
-          <a:noFill/>
-        </p:spPr>
-        <p:txBody>
-          <a:bodyPr wrap="none">
-            <a:spAutoFit/>
-          </a:bodyPr>
-          <a:lstStyle/>
-          <a:p>
-            <a:pPr>
-              <a:defRPr sz="1700">
-                <a:solidFill>
-                  <a:srgbClr val="0C2245"/>
-                </a:solidFill>
-              </a:defRPr>
-            </a:pPr>
-            <a:r>
-              <a:t>• DATE_MISMATCH: documents disagree on loss date (CIP-CLM-200 section 2.1)</a:t>
-            </a:r>
-          </a:p>
-          <a:p>
-            <a:pPr>
-              <a:defRPr sz="1700">
-                <a:solidFill>
-                  <a:srgbClr val="0C2245"/>
-                </a:solidFill>
-              </a:defRPr>
-            </a:pPr>
-            <a:r>
-              <a:t>• VEHICLE_MISMATCH: VIN or plate differs across sources (section 2.2)</a:t>
-            </a:r>
-          </a:p>
-          <a:p>
-            <a:pPr>
-              <a:defRPr sz="1700">
-                <a:solidFill>
-                  <a:srgbClr val="0C2245"/>
-                </a:solidFill>
-              </a:defRPr>
-            </a:pPr>
-            <a:r>
-              <a:t>• DAMAGE_LOCATION_MISMATCH: described damage conflicts with other evidence (section 2.3)</a:t>
-            </a:r>
-          </a:p>
-          <a:p>
-            <a:pPr>
-              <a:defRPr sz="1700">
-                <a:solidFill>
-                  <a:srgbClr val="0C2245"/>
-                </a:solidFill>
-              </a:defRPr>
-            </a:pPr>
-            <a:r>
-              <a:t>• COVER_NOT_IN_FORCE: loss falls outside policy period (CIP-POL-100 section 1.1)</a:t>
-            </a:r>
-          </a:p>
-          <a:p>
-            <a:pPr>
-              <a:defRPr sz="1700">
-                <a:solidFill>
-                  <a:srgbClr val="0C2245"/>
-                </a:solidFill>
-              </a:defRPr>
-            </a:pPr>
-            <a:r>
-              <a:t>• EXCEEDS_AUTHORITY: estimate exceeds handler authority limit (section 3)</a:t>
-            </a:r>
-          </a:p>
-          <a:p>
-            <a:pPr>
-              <a:defRPr sz="1700">
-                <a:solidFill>
-                  <a:srgbClr val="0C2245"/>
-                </a:solidFill>
-              </a:defRPr>
-            </a:pPr>
-            <a:r>
-              <a:t>• ESTIMATE_EVIDENCE_MISMATCH: repair estimate exceeds visible photo damage band (CIP-CLM-220 section 4)</a:t>
-            </a:r>
-          </a:p>
-        </p:txBody>
-      </p:sp>
-      <p:sp>
-        <p:nvSpPr>
-          <p:cNvPr id="5" name="Rectangle 4"/>
-          <p:cNvSpPr/>
-          <p:nvPr/>
-        </p:nvSpPr>
-        <p:spPr>
-          <a:xfrm>
-            <a:off x="6583680" y="1554480"/>
-            <a:ext cx="4297680" cy="2377440"/>
-          </a:xfrm>
-          <a:prstGeom prst="rect">
-            <a:avLst/>
-          </a:prstGeom>
-          <a:solidFill>
-            <a:srgbClr val="F5F7FA"/>
-          </a:solidFill>
-          <a:ln>
-            <a:solidFill>
-              <a:srgbClr val="009966"/>
-            </a:solidFill>
-          </a:ln>
-        </p:spPr>
-        <p:style>
-          <a:lnRef idx="1">
-            <a:schemeClr val="accent1"/>
-          </a:lnRef>
-          <a:fillRef idx="3">
-            <a:schemeClr val="accent1"/>
-          </a:fillRef>
-          <a:effectRef idx="2">
-            <a:schemeClr val="accent1"/>
-          </a:effectRef>
-          <a:fontRef idx="minor">
-            <a:schemeClr val="lt1"/>
-          </a:fontRef>
-        </p:style>
-        <p:txBody>
-          <a:bodyPr rtlCol="0" anchor="ctr"/>
-          <a:lstStyle/>
-          <a:p>
-            <a:pPr algn="ctr">
-              <a:defRPr sz="2000" b="1">
-                <a:solidFill>
-                  <a:srgbClr val="0C2245"/>
-                </a:solidFill>
-              </a:defRPr>
-            </a:pPr>
-            <a:r>
-              <a:t>Safety rule</a:t>
-            </a:r>
-          </a:p>
-          <a:p>
-            <a:pPr>
-              <a:defRPr sz="1600" b="0">
-                <a:solidFill>
-                  <a:srgbClr val="0C2245"/>
-                </a:solidFill>
-              </a:defRPr>
-            </a:pPr>
-            <a:r>
-              <a:t>Never approve / decline / pay</a:t>
-            </a:r>
-          </a:p>
-          <a:p>
-            <a:pPr>
-              <a:defRPr sz="1600" b="0">
-                <a:solidFill>
-                  <a:srgbClr val="0C2245"/>
-                </a:solidFill>
-              </a:defRPr>
-            </a:pPr>
-            <a:r>
-              <a:t>Always recommend proceed / request_information / refer</a:t>
-            </a:r>
-          </a:p>
-        </p:txBody>
-      </p:sp>
-    </p:spTree>
-  </p:cSld>
-  <p:clrMapOvr>
-    <a:masterClrMapping/>
-  </p:clrMapOvr>
-</p:sld>
-</file>
-
-<file path=ppt/slides/slide6.xml><?xml version="1.0" encoding="utf-8"?>
-<p:sld xmlns:a="http://schemas.openxmlformats.org/drawingml/2006/main" xmlns:p="http://schemas.openxmlformats.org/presentationml/2006/main" xmlns:r="http://schemas.openxmlformats.org/officeDocument/2006/relationships">
-  <p:cSld>
-    <p:spTree>
-      <p:nvGrpSpPr>
-        <p:cNvPr id="1" name=""/>
-        <p:cNvGrpSpPr/>
-        <p:nvPr/>
-      </p:nvGrpSpPr>
-      <p:grpSpPr/>
-      <p:sp>
-        <p:nvSpPr>
-          <p:cNvPr id="2" name="TextBox 1"/>
-          <p:cNvSpPr txBox="1"/>
-          <p:nvPr/>
-        </p:nvSpPr>
-        <p:spPr>
-          <a:xfrm>
-            <a:off x="457200" y="320040"/>
-            <a:ext cx="10972800" cy="640080"/>
-          </a:xfrm>
-          <a:prstGeom prst="rect">
-            <a:avLst/>
-          </a:prstGeom>
-          <a:noFill/>
-        </p:spPr>
-        <p:txBody>
-          <a:bodyPr wrap="none">
-            <a:spAutoFit/>
-          </a:bodyPr>
-          <a:lstStyle/>
-          <a:p>
-            <a:pPr>
-              <a:defRPr sz="2800" b="1">
-                <a:solidFill>
-                  <a:srgbClr val="0C2245"/>
-                </a:solidFill>
-              </a:defRPr>
-            </a:pPr>
-            <a:r>
-              <a:t>Evaluation results</a:t>
-            </a:r>
-          </a:p>
-        </p:txBody>
-      </p:sp>
-      <p:sp>
-        <p:nvSpPr>
-          <p:cNvPr id="3" name="TextBox 2"/>
-          <p:cNvSpPr txBox="1"/>
-          <p:nvPr/>
-        </p:nvSpPr>
-        <p:spPr>
-          <a:xfrm>
-            <a:off x="502920" y="914400"/>
-            <a:ext cx="10515600" cy="457200"/>
-          </a:xfrm>
-          <a:prstGeom prst="rect">
-            <a:avLst/>
-          </a:prstGeom>
-          <a:noFill/>
-        </p:spPr>
-        <p:txBody>
-          <a:bodyPr wrap="none">
-            <a:spAutoFit/>
-          </a:bodyPr>
-          <a:lstStyle/>
-          <a:p>
-            <a:pPr>
-              <a:defRPr sz="1300">
-                <a:solidFill>
-                  <a:srgbClr val="586069"/>
-                </a:solidFill>
-              </a:defRPr>
-            </a:pPr>
-            <a:r>
-              <a:t>Verified against the ground truth in the lab environment</a:t>
-            </a:r>
-          </a:p>
-        </p:txBody>
-      </p:sp>
-      <p:sp>
-        <p:nvSpPr>
-          <p:cNvPr id="4" name="Rectangle 3"/>
-          <p:cNvSpPr/>
-          <p:nvPr/>
-        </p:nvSpPr>
-        <p:spPr>
-          <a:xfrm>
-            <a:off x="640080" y="1737360"/>
-            <a:ext cx="3017520" cy="1554480"/>
-          </a:xfrm>
-          <a:prstGeom prst="rect">
-            <a:avLst/>
-          </a:prstGeom>
-          <a:solidFill>
-            <a:srgbClr val="F5F7FA"/>
-          </a:solidFill>
-          <a:ln>
-            <a:solidFill>
-              <a:srgbClr val="0066CC"/>
-            </a:solidFill>
-          </a:ln>
-        </p:spPr>
-        <p:style>
-          <a:lnRef idx="1">
-            <a:schemeClr val="accent1"/>
-          </a:lnRef>
-          <a:fillRef idx="3">
-            <a:schemeClr val="accent1"/>
-          </a:fillRef>
-          <a:effectRef idx="2">
-            <a:schemeClr val="accent1"/>
-          </a:effectRef>
-          <a:fontRef idx="minor">
-            <a:schemeClr val="lt1"/>
-          </a:fontRef>
-        </p:style>
-        <p:txBody>
-          <a:bodyPr rtlCol="0" anchor="ctr"/>
-          <a:lstStyle/>
-          <a:p>
-            <a:pPr algn="ctr">
-              <a:defRPr sz="2200" b="1">
-                <a:solidFill>
-                  <a:srgbClr val="0066CC"/>
-                </a:solidFill>
-              </a:defRPr>
-            </a:pPr>
-            <a:r>
-              <a:t>45 / 45</a:t>
-            </a:r>
-          </a:p>
-          <a:p>
-            <a:pPr>
-              <a:defRPr sz="1100">
-                <a:solidFill>
-                  <a:srgbClr val="586069"/>
-                </a:solidFill>
-              </a:defRPr>
-            </a:pPr>
-            <a:r>
-              <a:t>Extraction accuracy</a:t>
-            </a:r>
-          </a:p>
-          <a:p>
-            <a:pPr>
-              <a:defRPr sz="1000">
-                <a:solidFill>
-                  <a:srgbClr val="586069"/>
-                </a:solidFill>
-              </a:defRPr>
-            </a:pPr>
-            <a:r>
-              <a:t>100%</a:t>
-            </a:r>
-          </a:p>
-        </p:txBody>
-      </p:sp>
-      <p:sp>
-        <p:nvSpPr>
-          <p:cNvPr id="5" name="Rectangle 4"/>
-          <p:cNvSpPr/>
-          <p:nvPr/>
-        </p:nvSpPr>
-        <p:spPr>
-          <a:xfrm>
-            <a:off x="4297680" y="1737360"/>
-            <a:ext cx="3017520" cy="1554480"/>
-          </a:xfrm>
-          <a:prstGeom prst="rect">
-            <a:avLst/>
-          </a:prstGeom>
-          <a:solidFill>
-            <a:srgbClr val="F5F7FA"/>
-          </a:solidFill>
-          <a:ln>
-            <a:solidFill>
-              <a:srgbClr val="0066CC"/>
-            </a:solidFill>
-          </a:ln>
-        </p:spPr>
-        <p:style>
-          <a:lnRef idx="1">
-            <a:schemeClr val="accent1"/>
-          </a:lnRef>
-          <a:fillRef idx="3">
-            <a:schemeClr val="accent1"/>
-          </a:fillRef>
-          <a:effectRef idx="2">
-            <a:schemeClr val="accent1"/>
-          </a:effectRef>
-          <a:fontRef idx="minor">
-            <a:schemeClr val="lt1"/>
-          </a:fontRef>
-        </p:style>
-        <p:txBody>
-          <a:bodyPr rtlCol="0" anchor="ctr"/>
-          <a:lstStyle/>
-          <a:p>
-            <a:pPr algn="ctr">
-              <a:defRPr sz="2200" b="1">
-                <a:solidFill>
-                  <a:srgbClr val="0066CC"/>
-                </a:solidFill>
-              </a:defRPr>
-            </a:pPr>
-            <a:r>
-              <a:t>10 / 10</a:t>
-            </a:r>
-          </a:p>
-          <a:p>
-            <a:pPr>
-              <a:defRPr sz="1100">
-                <a:solidFill>
-                  <a:srgbClr val="586069"/>
-                </a:solidFill>
-              </a:defRPr>
-            </a:pPr>
-            <a:r>
-              <a:t>Findings detected</a:t>
-            </a:r>
-          </a:p>
-          <a:p>
-            <a:pPr>
-              <a:defRPr sz="1000">
-                <a:solidFill>
-                  <a:srgbClr val="586069"/>
-                </a:solidFill>
-              </a:defRPr>
-            </a:pPr>
-            <a:r>
-              <a:t>0 spurious</a:t>
-            </a:r>
-          </a:p>
-        </p:txBody>
-      </p:sp>
-      <p:sp>
-        <p:nvSpPr>
-          <p:cNvPr id="6" name="Rectangle 5"/>
-          <p:cNvSpPr/>
-          <p:nvPr/>
-        </p:nvSpPr>
-        <p:spPr>
-          <a:xfrm>
-            <a:off x="7955279" y="1737360"/>
-            <a:ext cx="3017520" cy="1554480"/>
-          </a:xfrm>
-          <a:prstGeom prst="rect">
-            <a:avLst/>
-          </a:prstGeom>
-          <a:solidFill>
-            <a:srgbClr val="F5F7FA"/>
-          </a:solidFill>
-          <a:ln>
-            <a:solidFill>
-              <a:srgbClr val="0066CC"/>
-            </a:solidFill>
-          </a:ln>
-        </p:spPr>
-        <p:style>
-          <a:lnRef idx="1">
-            <a:schemeClr val="accent1"/>
-          </a:lnRef>
-          <a:fillRef idx="3">
-            <a:schemeClr val="accent1"/>
-          </a:fillRef>
-          <a:effectRef idx="2">
-            <a:schemeClr val="accent1"/>
-          </a:effectRef>
-          <a:fontRef idx="minor">
-            <a:schemeClr val="lt1"/>
-          </a:fontRef>
-        </p:style>
-        <p:txBody>
-          <a:bodyPr rtlCol="0" anchor="ctr"/>
-          <a:lstStyle/>
-          <a:p>
-            <a:pPr algn="ctr">
-              <a:defRPr sz="2200" b="1">
-                <a:solidFill>
-                  <a:srgbClr val="0066CC"/>
-                </a:solidFill>
-              </a:defRPr>
-            </a:pPr>
-            <a:r>
-              <a:t>5 / 5</a:t>
-            </a:r>
-          </a:p>
-          <a:p>
-            <a:pPr>
-              <a:defRPr sz="1100">
-                <a:solidFill>
-                  <a:srgbClr val="586069"/>
-                </a:solidFill>
-              </a:defRPr>
-            </a:pPr>
-            <a:r>
-              <a:t>Recommendation match</a:t>
-            </a:r>
-          </a:p>
-          <a:p>
-            <a:pPr>
-              <a:defRPr sz="1000">
-                <a:solidFill>
-                  <a:srgbClr val="586069"/>
-                </a:solidFill>
-              </a:defRPr>
-            </a:pPr>
-            <a:r>
-              <a:t>100%</a:t>
-            </a:r>
-          </a:p>
-        </p:txBody>
-      </p:sp>
-      <p:sp>
-        <p:nvSpPr>
-          <p:cNvPr id="7" name="Rectangle 6"/>
-          <p:cNvSpPr/>
-          <p:nvPr/>
-        </p:nvSpPr>
-        <p:spPr>
-          <a:xfrm>
-            <a:off x="640080" y="3749039"/>
-            <a:ext cx="3017520" cy="1554480"/>
-          </a:xfrm>
-          <a:prstGeom prst="rect">
-            <a:avLst/>
-          </a:prstGeom>
-          <a:solidFill>
-            <a:srgbClr val="F5F7FA"/>
-          </a:solidFill>
-          <a:ln>
-            <a:solidFill>
-              <a:srgbClr val="0066CC"/>
-            </a:solidFill>
-          </a:ln>
-        </p:spPr>
-        <p:style>
-          <a:lnRef idx="1">
-            <a:schemeClr val="accent1"/>
-          </a:lnRef>
-          <a:fillRef idx="3">
-            <a:schemeClr val="accent1"/>
-          </a:fillRef>
-          <a:effectRef idx="2">
-            <a:schemeClr val="accent1"/>
-          </a:effectRef>
-          <a:fontRef idx="minor">
-            <a:schemeClr val="lt1"/>
-          </a:fontRef>
-        </p:style>
-        <p:txBody>
-          <a:bodyPr rtlCol="0" anchor="ctr"/>
-          <a:lstStyle/>
-          <a:p>
-            <a:pPr algn="ctr">
-              <a:defRPr sz="2200" b="1">
-                <a:solidFill>
-                  <a:srgbClr val="0066CC"/>
-                </a:solidFill>
-              </a:defRPr>
-            </a:pPr>
-            <a:r>
-              <a:t>0</a:t>
-            </a:r>
-          </a:p>
-          <a:p>
-            <a:pPr>
-              <a:defRPr sz="1100">
-                <a:solidFill>
-                  <a:srgbClr val="586069"/>
-                </a:solidFill>
-              </a:defRPr>
-            </a:pPr>
-            <a:r>
-              <a:t>Safety violations</a:t>
-            </a:r>
-          </a:p>
-          <a:p>
-            <a:pPr>
-              <a:defRPr sz="1000">
-                <a:solidFill>
-                  <a:srgbClr val="586069"/>
-                </a:solidFill>
-              </a:defRPr>
-            </a:pPr>
-            <a:r>
-              <a:t>No forbidden approval/decline/payment wording</a:t>
-            </a:r>
-          </a:p>
-        </p:txBody>
-      </p:sp>
-      <p:sp>
-        <p:nvSpPr>
-          <p:cNvPr id="8" name="Rectangle 7"/>
-          <p:cNvSpPr/>
-          <p:nvPr/>
-        </p:nvSpPr>
-        <p:spPr>
-          <a:xfrm>
-            <a:off x="4297680" y="3749039"/>
-            <a:ext cx="3017520" cy="1554480"/>
-          </a:xfrm>
-          <a:prstGeom prst="rect">
-            <a:avLst/>
-          </a:prstGeom>
-          <a:solidFill>
-            <a:srgbClr val="F5F7FA"/>
-          </a:solidFill>
-          <a:ln>
-            <a:solidFill>
-              <a:srgbClr val="0066CC"/>
-            </a:solidFill>
-          </a:ln>
-        </p:spPr>
-        <p:style>
-          <a:lnRef idx="1">
-            <a:schemeClr val="accent1"/>
-          </a:lnRef>
-          <a:fillRef idx="3">
-            <a:schemeClr val="accent1"/>
-          </a:fillRef>
-          <a:effectRef idx="2">
-            <a:schemeClr val="accent1"/>
-          </a:effectRef>
-          <a:fontRef idx="minor">
-            <a:schemeClr val="lt1"/>
-          </a:fontRef>
-        </p:style>
-        <p:txBody>
-          <a:bodyPr rtlCol="0" anchor="ctr"/>
-          <a:lstStyle/>
-          <a:p>
-            <a:pPr algn="ctr">
-              <a:defRPr sz="2200" b="1">
-                <a:solidFill>
-                  <a:srgbClr val="0066CC"/>
-                </a:solidFill>
-              </a:defRPr>
-            </a:pPr>
-            <a:r>
-              <a:t>5 / 5</a:t>
-            </a:r>
-          </a:p>
-          <a:p>
-            <a:pPr>
-              <a:defRPr sz="1100">
-                <a:solidFill>
-                  <a:srgbClr val="586069"/>
-                </a:solidFill>
-              </a:defRPr>
-            </a:pPr>
-            <a:r>
-              <a:t>Claims fully passed</a:t>
-            </a:r>
-          </a:p>
-          <a:p>
-            <a:pPr>
-              <a:defRPr sz="1000">
-                <a:solidFill>
-                  <a:srgbClr val="586069"/>
-                </a:solidFill>
-              </a:defRPr>
-            </a:pPr>
-            <a:r>
-              <a:t>All use cases complete</a:t>
+              <a:t>This capstone project demonstrates a realistic and governance-safe AI use case in insurance operations.</a:t>
             </a:r>
           </a:p>
         </p:txBody>
@@ -5470,6 +3871,12 @@
 <file path=ppt/slides/slide7.xml><?xml version="1.0" encoding="utf-8"?>
 <p:sld xmlns:a="http://schemas.openxmlformats.org/drawingml/2006/main" xmlns:p="http://schemas.openxmlformats.org/presentationml/2006/main" xmlns:r="http://schemas.openxmlformats.org/officeDocument/2006/relationships">
   <p:cSld>
+    <p:bg>
+      <p:bgPr>
+        <a:solidFill/>
+        <a:effectLst/>
+      </p:bgPr>
+    </p:bg>
     <p:spTree>
       <p:nvGrpSpPr>
         <p:cNvPr id="1" name=""/>
@@ -5485,8 +3892,8 @@
         </p:nvSpPr>
         <p:spPr>
           <a:xfrm>
-            <a:off x="457200" y="320040"/>
-            <a:ext cx="10972800" cy="640080"/>
+            <a:off x="2011680" y="1645920"/>
+            <a:ext cx="8229600" cy="2011680"/>
           </a:xfrm>
           <a:prstGeom prst="rect">
             <a:avLst/>
@@ -5500,291 +3907,32 @@
           <a:lstStyle/>
           <a:p>
             <a:pPr>
-              <a:defRPr sz="2800" b="1">
-                <a:solidFill>
-                  <a:srgbClr val="0C2245"/>
-                </a:solidFill>
+              <a:defRPr sz="3400" b="1">
+                <a:solidFill/>
               </a:defRPr>
             </a:pPr>
             <a:r>
-              <a:t>Demo and rollout notes</a:t>
-            </a:r>
-          </a:p>
-        </p:txBody>
-      </p:sp>
-      <p:sp>
-        <p:nvSpPr>
-          <p:cNvPr id="3" name="TextBox 2"/>
-          <p:cNvSpPr txBox="1"/>
-          <p:nvPr/>
-        </p:nvSpPr>
-        <p:spPr>
-          <a:xfrm>
-            <a:off x="502920" y="914400"/>
-            <a:ext cx="10515600" cy="457200"/>
-          </a:xfrm>
-          <a:prstGeom prst="rect">
-            <a:avLst/>
-          </a:prstGeom>
-          <a:noFill/>
-        </p:spPr>
-        <p:txBody>
-          <a:bodyPr wrap="none">
-            <a:spAutoFit/>
-          </a:bodyPr>
-          <a:lstStyle/>
+              <a:t>Thank You</a:t>
+            </a:r>
+          </a:p>
           <a:p>
             <a:pPr>
-              <a:defRPr sz="1300">
-                <a:solidFill>
-                  <a:srgbClr val="586069"/>
-                </a:solidFill>
+              <a:defRPr sz="2200">
+                <a:solidFill/>
               </a:defRPr>
             </a:pPr>
             <a:r>
-              <a:t>How to present the solution confidently</a:t>
-            </a:r>
-          </a:p>
-        </p:txBody>
-      </p:sp>
-      <p:sp>
-        <p:nvSpPr>
-          <p:cNvPr id="4" name="TextBox 3"/>
-          <p:cNvSpPr txBox="1"/>
-          <p:nvPr/>
-        </p:nvSpPr>
-        <p:spPr>
-          <a:xfrm>
-            <a:off x="640080" y="1371600"/>
-            <a:ext cx="10698480" cy="4389120"/>
-          </a:xfrm>
-          <a:prstGeom prst="rect">
-            <a:avLst/>
-          </a:prstGeom>
-          <a:noFill/>
-        </p:spPr>
-        <p:txBody>
-          <a:bodyPr wrap="none">
-            <a:spAutoFit/>
-          </a:bodyPr>
-          <a:lstStyle/>
+              <a:t>Capstone Project Evaluation Presentation</a:t>
+            </a:r>
+          </a:p>
           <a:p>
             <a:pPr>
-              <a:defRPr sz="1800">
-                <a:solidFill>
-                  <a:srgbClr val="0C2245"/>
-                </a:solidFill>
+              <a:defRPr sz="1600">
+                <a:solidFill/>
               </a:defRPr>
             </a:pPr>
             <a:r>
-              <a:t>1. Walk through one clean claim and one tricky claim to show the evidence trail.</a:t>
-            </a:r>
-          </a:p>
-          <a:p>
-            <a:pPr>
-              <a:defRPr sz="1800">
-                <a:solidFill>
-                  <a:srgbClr val="0C2245"/>
-                </a:solidFill>
-              </a:defRPr>
-            </a:pPr>
-            <a:r>
-              <a:t>2. Highlight that every rule cites the source documents and policy sections.</a:t>
-            </a:r>
-          </a:p>
-          <a:p>
-            <a:pPr>
-              <a:defRPr sz="1800">
-                <a:solidFill>
-                  <a:srgbClr val="0C2245"/>
-                </a:solidFill>
-              </a:defRPr>
-            </a:pPr>
-            <a:r>
-              <a:t>3. Show the photo evidence contradicting a high estimate to demonstrate fraud indicator handling without alleging fraud.</a:t>
-            </a:r>
-          </a:p>
-          <a:p>
-            <a:pPr>
-              <a:defRPr sz="1800">
-                <a:solidFill>
-                  <a:srgbClr val="0C2245"/>
-                </a:solidFill>
-              </a:defRPr>
-            </a:pPr>
-            <a:r>
-              <a:t>4. Emphasize that the human handler remains the decision maker; the system only prepares, explains, and recommends.</a:t>
-            </a:r>
-          </a:p>
-          <a:p>
-            <a:pPr>
-              <a:defRPr sz="1800">
-                <a:solidFill>
-                  <a:srgbClr val="0C2245"/>
-                </a:solidFill>
-              </a:defRPr>
-            </a:pPr>
-            <a:r>
-              <a:t>5. Discuss how this reduces manual review time while improving consistency, auditability, and policy compliance.</a:t>
-            </a:r>
-          </a:p>
-          <a:p>
-            <a:pPr>
-              <a:defRPr sz="1800">
-                <a:solidFill>
-                  <a:srgbClr val="0C2245"/>
-                </a:solidFill>
-              </a:defRPr>
-            </a:pPr>
-            <a:r>
-              <a:t>6. Recommended next step: expand to production data, role-based access, and more policy corpora.</a:t>
-            </a:r>
-          </a:p>
-        </p:txBody>
-      </p:sp>
-    </p:spTree>
-  </p:cSld>
-  <p:clrMapOvr>
-    <a:masterClrMapping/>
-  </p:clrMapOvr>
-</p:sld>
-</file>
-
-<file path=ppt/slides/slide8.xml><?xml version="1.0" encoding="utf-8"?>
-<p:sld xmlns:a="http://schemas.openxmlformats.org/drawingml/2006/main" xmlns:p="http://schemas.openxmlformats.org/presentationml/2006/main" xmlns:r="http://schemas.openxmlformats.org/officeDocument/2006/relationships">
-  <p:cSld>
-    <p:spTree>
-      <p:nvGrpSpPr>
-        <p:cNvPr id="1" name=""/>
-        <p:cNvGrpSpPr/>
-        <p:nvPr/>
-      </p:nvGrpSpPr>
-      <p:grpSpPr/>
-      <p:sp>
-        <p:nvSpPr>
-          <p:cNvPr id="2" name="TextBox 1"/>
-          <p:cNvSpPr txBox="1"/>
-          <p:nvPr/>
-        </p:nvSpPr>
-        <p:spPr>
-          <a:xfrm>
-            <a:off x="457200" y="320040"/>
-            <a:ext cx="10972800" cy="640080"/>
-          </a:xfrm>
-          <a:prstGeom prst="rect">
-            <a:avLst/>
-          </a:prstGeom>
-          <a:noFill/>
-        </p:spPr>
-        <p:txBody>
-          <a:bodyPr wrap="none">
-            <a:spAutoFit/>
-          </a:bodyPr>
-          <a:lstStyle/>
-          <a:p>
-            <a:pPr>
-              <a:defRPr sz="2800" b="1">
-                <a:solidFill>
-                  <a:srgbClr val="0C2245"/>
-                </a:solidFill>
-              </a:defRPr>
-            </a:pPr>
-            <a:r>
-              <a:t>Thank you</a:t>
-            </a:r>
-          </a:p>
-        </p:txBody>
-      </p:sp>
-      <p:sp>
-        <p:nvSpPr>
-          <p:cNvPr id="3" name="TextBox 2"/>
-          <p:cNvSpPr txBox="1"/>
-          <p:nvPr/>
-        </p:nvSpPr>
-        <p:spPr>
-          <a:xfrm>
-            <a:off x="502920" y="914400"/>
-            <a:ext cx="10515600" cy="457200"/>
-          </a:xfrm>
-          <a:prstGeom prst="rect">
-            <a:avLst/>
-          </a:prstGeom>
-          <a:noFill/>
-        </p:spPr>
-        <p:txBody>
-          <a:bodyPr wrap="none">
-            <a:spAutoFit/>
-          </a:bodyPr>
-          <a:lstStyle/>
-          <a:p>
-            <a:pPr>
-              <a:defRPr sz="1300">
-                <a:solidFill>
-                  <a:srgbClr val="586069"/>
-                </a:solidFill>
-              </a:defRPr>
-            </a:pPr>
-            <a:r>
-              <a:t>Contoso Insurance claims automation with audit-ready evidence and a human-safe decision boundary</a:t>
-            </a:r>
-          </a:p>
-        </p:txBody>
-      </p:sp>
-      <p:sp>
-        <p:nvSpPr>
-          <p:cNvPr id="4" name="TextBox 3"/>
-          <p:cNvSpPr txBox="1"/>
-          <p:nvPr/>
-        </p:nvSpPr>
-        <p:spPr>
-          <a:xfrm>
-            <a:off x="1188720" y="2011680"/>
-            <a:ext cx="9509760" cy="2011680"/>
-          </a:xfrm>
-          <a:prstGeom prst="rect">
-            <a:avLst/>
-          </a:prstGeom>
-          <a:noFill/>
-        </p:spPr>
-        <p:txBody>
-          <a:bodyPr wrap="none">
-            <a:spAutoFit/>
-          </a:bodyPr>
-          <a:lstStyle/>
-          <a:p>
-            <a:pPr algn="ctr">
-              <a:defRPr sz="2000">
-                <a:solidFill>
-                  <a:srgbClr val="0C2245"/>
-                </a:solidFill>
-              </a:defRPr>
-            </a:pPr>
-            <a:r>
-              <a:t>Key message: evidence -&gt; extraction -&gt; rules -&gt; grounded reasoning -&gt; handler decision</a:t>
-            </a:r>
-          </a:p>
-          <a:p>
-            <a:pPr algn="ctr">
-              <a:defRPr sz="2000">
-                <a:solidFill>
-                  <a:srgbClr val="0C2245"/>
-                </a:solidFill>
-              </a:defRPr>
-            </a:pPr>
-            <a:r>
-              <a:t>Result: all five sample claims pass in the lab, with no safety violations and full policy alignment</a:t>
-            </a:r>
-          </a:p>
-          <a:p>
-            <a:pPr algn="ctr">
-              <a:defRPr sz="2000">
-                <a:solidFill>
-                  <a:srgbClr val="0C2245"/>
-                </a:solidFill>
-              </a:defRPr>
-            </a:pPr>
-            <a:r>
-              <a:t>Contact: Claims automation team | Microsoft FDE / Wipro AI Academy</a:t>
+              <a:t>AI-Powered Motor Claims Review | Human-in-the-loop decision support</a:t>
             </a:r>
           </a:p>
         </p:txBody>
